--- a/docs/demos/presentacion/ExamLab-Modelo-Modular.pptx
+++ b/docs/demos/presentacion/ExamLab-Modelo-Modular.pptx
@@ -7,6 +7,10 @@
   <p:sldIdLst>
     <p:sldId id="256" r:id="rId7"/>
     <p:sldId id="257" r:id="rId8"/>
+    <p:sldId id="258" r:id="rId9"/>
+    <p:sldId id="259" r:id="rId10"/>
+    <p:sldId id="260" r:id="rId11"/>
+    <p:sldId id="261" r:id="rId12"/>
   </p:sldIdLst>
   <p:sldSz cx="12191695" cy="6858000" type="screen4x3"/>
   <p:notesSz cx="6858000" cy="9144000"/>
@@ -3082,14 +3086,6 @@
 <file path=ppt/slides/slide1.xml><?xml version="1.0" encoding="utf-8"?>
 <p:sld xmlns:a="http://schemas.openxmlformats.org/drawingml/2006/main" xmlns:p="http://schemas.openxmlformats.org/presentationml/2006/main" xmlns:r="http://schemas.openxmlformats.org/officeDocument/2006/relationships">
   <p:cSld>
-    <p:bg>
-      <p:bgPr>
-        <a:solidFill>
-          <a:srgbClr val="FFFFFF"/>
-        </a:solidFill>
-        <a:effectLst/>
-      </p:bgPr>
-    </p:bg>
     <p:spTree>
       <p:nvGrpSpPr>
         <p:cNvPr id="1" name=""/>
@@ -3099,7 +3095,7 @@
       <p:grpSpPr/>
       <p:sp>
         <p:nvSpPr>
-          <p:cNvPr id="2" name="Rectangle 1"/>
+          <p:cNvPr id="2" name="Rounded Rectangle 1"/>
           <p:cNvSpPr/>
           <p:nvPr/>
         </p:nvSpPr>
@@ -3108,11 +3104,13 @@
             <a:off x="0" y="0"/>
             <a:ext cx="12191695" cy="6858000"/>
           </a:xfrm>
-          <a:prstGeom prst="rect">
-            <a:avLst/>
+          <a:prstGeom prst="roundRect">
+            <a:avLst>
+              <a:gd name="adj" fmla="val 5000"/>
+            </a:avLst>
           </a:prstGeom>
           <a:solidFill>
-            <a:srgbClr val="FFFFFF"/>
+            <a:srgbClr val="0F3E4C"/>
           </a:solidFill>
           <a:ln>
             <a:noFill/>
@@ -3143,23 +3141,220 @@
       </p:sp>
       <p:sp>
         <p:nvSpPr>
-          <p:cNvPr id="3" name="Rectangle 2"/>
+          <p:cNvPr id="3" name="TextBox 2"/>
+          <p:cNvSpPr txBox="1"/>
+          <p:nvPr/>
+        </p:nvSpPr>
+        <p:spPr>
+          <a:xfrm>
+            <a:off x="914400" y="2194560"/>
+            <a:ext cx="10332720" cy="457200"/>
+          </a:xfrm>
+          <a:prstGeom prst="rect">
+            <a:avLst/>
+          </a:prstGeom>
+          <a:noFill/>
+        </p:spPr>
+        <p:txBody>
+          <a:bodyPr wrap="square" anchor="t" lIns="0" rIns="0" tIns="0" bIns="0">
+            <a:spAutoFit/>
+          </a:bodyPr>
+          <a:lstStyle/>
+          <a:p>
+            <a:pPr algn="l"/>
+            <a:r>
+              <a:rPr sz="1600" b="1" i="0">
+                <a:solidFill>
+                  <a:srgbClr val="2EB8C7"/>
+                </a:solidFill>
+                <a:latin typeface="Calibri"/>
+              </a:rPr>
+              <a:t>EXAMLAB</a:t>
+            </a:r>
+          </a:p>
+        </p:txBody>
+      </p:sp>
+      <p:sp>
+        <p:nvSpPr>
+          <p:cNvPr id="4" name="TextBox 3"/>
+          <p:cNvSpPr txBox="1"/>
+          <p:nvPr/>
+        </p:nvSpPr>
+        <p:spPr>
+          <a:xfrm>
+            <a:off x="914400" y="2743200"/>
+            <a:ext cx="10332720" cy="1097280"/>
+          </a:xfrm>
+          <a:prstGeom prst="rect">
+            <a:avLst/>
+          </a:prstGeom>
+          <a:noFill/>
+        </p:spPr>
+        <p:txBody>
+          <a:bodyPr wrap="square" anchor="t" lIns="0" rIns="0" tIns="0" bIns="0">
+            <a:spAutoFit/>
+          </a:bodyPr>
+          <a:lstStyle/>
+          <a:p>
+            <a:pPr algn="l"/>
+            <a:r>
+              <a:rPr sz="5400" b="1" i="0">
+                <a:solidFill>
+                  <a:srgbClr val="FFFFFF"/>
+                </a:solidFill>
+                <a:latin typeface="Calibri"/>
+              </a:rPr>
+              <a:t>Modelo modular</a:t>
+            </a:r>
+          </a:p>
+        </p:txBody>
+      </p:sp>
+      <p:sp>
+        <p:nvSpPr>
+          <p:cNvPr id="5" name="TextBox 4"/>
+          <p:cNvSpPr txBox="1"/>
+          <p:nvPr/>
+        </p:nvSpPr>
+        <p:spPr>
+          <a:xfrm>
+            <a:off x="914400" y="4023360"/>
+            <a:ext cx="10332720" cy="548640"/>
+          </a:xfrm>
+          <a:prstGeom prst="rect">
+            <a:avLst/>
+          </a:prstGeom>
+          <a:noFill/>
+        </p:spPr>
+        <p:txBody>
+          <a:bodyPr wrap="square" anchor="t" lIns="0" rIns="0" tIns="0" bIns="0">
+            <a:spAutoFit/>
+          </a:bodyPr>
+          <a:lstStyle/>
+          <a:p>
+            <a:pPr algn="l"/>
+            <a:r>
+              <a:rPr sz="1800" b="0" i="0">
+                <a:solidFill>
+                  <a:srgbClr val="C9DDE3"/>
+                </a:solidFill>
+                <a:latin typeface="Calibri"/>
+              </a:rPr>
+              <a:t>Un plan base por tamaño + add-ons a la carta. Sin versión gratuita: pagas por lo que usas.</a:t>
+            </a:r>
+          </a:p>
+        </p:txBody>
+      </p:sp>
+    </p:spTree>
+  </p:cSld>
+  <p:clrMapOvr>
+    <a:masterClrMapping/>
+  </p:clrMapOvr>
+</p:sld>
+</file>
+
+<file path=ppt/slides/slide2.xml><?xml version="1.0" encoding="utf-8"?>
+<p:sld xmlns:a="http://schemas.openxmlformats.org/drawingml/2006/main" xmlns:p="http://schemas.openxmlformats.org/presentationml/2006/main" xmlns:r="http://schemas.openxmlformats.org/officeDocument/2006/relationships">
+  <p:cSld>
+    <p:spTree>
+      <p:nvGrpSpPr>
+        <p:cNvPr id="1" name=""/>
+        <p:cNvGrpSpPr/>
+        <p:nvPr/>
+      </p:nvGrpSpPr>
+      <p:grpSpPr/>
+      <p:sp>
+        <p:nvSpPr>
+          <p:cNvPr id="2" name="TextBox 1"/>
+          <p:cNvSpPr txBox="1"/>
+          <p:nvPr/>
+        </p:nvSpPr>
+        <p:spPr>
+          <a:xfrm>
+            <a:off x="457200" y="365760"/>
+            <a:ext cx="10972800" cy="365760"/>
+          </a:xfrm>
+          <a:prstGeom prst="rect">
+            <a:avLst/>
+          </a:prstGeom>
+          <a:noFill/>
+        </p:spPr>
+        <p:txBody>
+          <a:bodyPr wrap="square" anchor="t" lIns="0" rIns="0" tIns="0" bIns="0">
+            <a:spAutoFit/>
+          </a:bodyPr>
+          <a:lstStyle/>
+          <a:p>
+            <a:pPr algn="l"/>
+            <a:r>
+              <a:rPr sz="1200" b="1" i="0">
+                <a:solidFill>
+                  <a:srgbClr val="2EB8C7"/>
+                </a:solidFill>
+                <a:latin typeface="Calibri"/>
+              </a:rPr>
+              <a:t>CÓMO SE ARMA</a:t>
+            </a:r>
+          </a:p>
+        </p:txBody>
+      </p:sp>
+      <p:sp>
+        <p:nvSpPr>
+          <p:cNvPr id="3" name="TextBox 2"/>
+          <p:cNvSpPr txBox="1"/>
+          <p:nvPr/>
+        </p:nvSpPr>
+        <p:spPr>
+          <a:xfrm>
+            <a:off x="457200" y="713232"/>
+            <a:ext cx="11247120" cy="731520"/>
+          </a:xfrm>
+          <a:prstGeom prst="rect">
+            <a:avLst/>
+          </a:prstGeom>
+          <a:noFill/>
+        </p:spPr>
+        <p:txBody>
+          <a:bodyPr wrap="square" anchor="t" lIns="0" rIns="0" tIns="0" bIns="0">
+            <a:spAutoFit/>
+          </a:bodyPr>
+          <a:lstStyle/>
+          <a:p>
+            <a:pPr algn="l"/>
+            <a:r>
+              <a:rPr sz="3000" b="1" i="0">
+                <a:solidFill>
+                  <a:srgbClr val="0F3E4C"/>
+                </a:solidFill>
+                <a:latin typeface="Calibri"/>
+              </a:rPr>
+              <a:t>Dos capas: un plan base + los add-ons que necesites</a:t>
+            </a:r>
+          </a:p>
+        </p:txBody>
+      </p:sp>
+      <p:sp>
+        <p:nvSpPr>
+          <p:cNvPr id="4" name="Rounded Rectangle 3"/>
           <p:cNvSpPr/>
           <p:nvPr/>
         </p:nvSpPr>
         <p:spPr>
           <a:xfrm>
-            <a:off x="0" y="2148840"/>
-            <a:ext cx="12191695" cy="54864"/>
-          </a:xfrm>
-          <a:prstGeom prst="rect">
-            <a:avLst/>
+            <a:off x="457200" y="1737360"/>
+            <a:ext cx="5486400" cy="4023360"/>
+          </a:xfrm>
+          <a:prstGeom prst="roundRect">
+            <a:avLst>
+              <a:gd name="adj" fmla="val 5000"/>
+            </a:avLst>
           </a:prstGeom>
           <a:solidFill>
-            <a:srgbClr val="059669"/>
+            <a:srgbClr val="F0F9FB"/>
           </a:solidFill>
-          <a:ln>
-            <a:noFill/>
+          <a:ln w="25400">
+            <a:solidFill>
+              <a:srgbClr val="147A8C"/>
+            </a:solidFill>
           </a:ln>
           <a:effectLst/>
         </p:spPr>
@@ -3187,68 +3382,35 @@
       </p:sp>
       <p:sp>
         <p:nvSpPr>
-          <p:cNvPr id="4" name="TextBox 3"/>
-          <p:cNvSpPr txBox="1"/>
-          <p:nvPr/>
-        </p:nvSpPr>
-        <p:spPr>
-          <a:xfrm>
-            <a:off x="822960" y="1051560"/>
-            <a:ext cx="10515600" cy="457200"/>
-          </a:xfrm>
-          <a:prstGeom prst="rect">
-            <a:avLst/>
-          </a:prstGeom>
-          <a:noFill/>
-        </p:spPr>
-        <p:txBody>
-          <a:bodyPr wrap="square" lIns="45720" rIns="45720" tIns="18288" bIns="18288">
-            <a:spAutoFit/>
-          </a:bodyPr>
-          <a:lstStyle/>
-          <a:p>
-            <a:r>
-              <a:rPr sz="1300" b="1" i="0">
-                <a:solidFill>
-                  <a:srgbClr val="7C3AED"/>
-                </a:solidFill>
-                <a:latin typeface="Calibri"/>
-              </a:rPr>
-              <a:t>EXAMLAB · MODELO COMERCIAL</a:t>
-            </a:r>
-          </a:p>
-        </p:txBody>
-      </p:sp>
-      <p:sp>
-        <p:nvSpPr>
           <p:cNvPr id="5" name="TextBox 4"/>
           <p:cNvSpPr txBox="1"/>
           <p:nvPr/>
         </p:nvSpPr>
         <p:spPr>
           <a:xfrm>
-            <a:off x="822960" y="1417320"/>
-            <a:ext cx="10607040" cy="914400"/>
-          </a:xfrm>
-          <a:prstGeom prst="rect">
-            <a:avLst/>
-          </a:prstGeom>
-          <a:noFill/>
-        </p:spPr>
-        <p:txBody>
-          <a:bodyPr wrap="square" lIns="45720" rIns="45720" tIns="18288" bIns="18288">
-            <a:spAutoFit/>
-          </a:bodyPr>
-          <a:lstStyle/>
-          <a:p>
-            <a:r>
-              <a:rPr sz="4000" b="1" i="0">
-                <a:solidFill>
-                  <a:srgbClr val="1F2937"/>
-                </a:solidFill>
-                <a:latin typeface="Calibri"/>
-              </a:rPr>
-              <a:t>Modelo modular de negocio</a:t>
+            <a:off x="731520" y="1965960"/>
+            <a:ext cx="4937760" cy="457200"/>
+          </a:xfrm>
+          <a:prstGeom prst="rect">
+            <a:avLst/>
+          </a:prstGeom>
+          <a:noFill/>
+        </p:spPr>
+        <p:txBody>
+          <a:bodyPr wrap="square" anchor="t" lIns="0" rIns="0" tIns="0" bIns="0">
+            <a:spAutoFit/>
+          </a:bodyPr>
+          <a:lstStyle/>
+          <a:p>
+            <a:pPr algn="l"/>
+            <a:r>
+              <a:rPr sz="1800" b="1" i="0">
+                <a:solidFill>
+                  <a:srgbClr val="0F3E4C"/>
+                </a:solidFill>
+                <a:latin typeface="Calibri"/>
+              </a:rPr>
+              <a:t>1 · Plan base (obligatorio)</a:t>
             </a:r>
           </a:p>
         </p:txBody>
@@ -3261,28 +3423,29 @@
         </p:nvSpPr>
         <p:spPr>
           <a:xfrm>
-            <a:off x="822960" y="2331720"/>
-            <a:ext cx="10607040" cy="822960"/>
-          </a:xfrm>
-          <a:prstGeom prst="rect">
-            <a:avLst/>
-          </a:prstGeom>
-          <a:noFill/>
-        </p:spPr>
-        <p:txBody>
-          <a:bodyPr wrap="square" lIns="45720" rIns="45720" tIns="18288" bIns="18288">
-            <a:spAutoFit/>
-          </a:bodyPr>
-          <a:lstStyle/>
-          <a:p>
-            <a:r>
-              <a:rPr sz="1700" b="0" i="0">
-                <a:solidFill>
-                  <a:srgbClr val="6B7280"/>
-                </a:solidFill>
-                <a:latin typeface="Calibri"/>
-              </a:rPr>
-              <a:t>Un plan por capacidad — no todos los módulos en todos los planes. La IA embebida es el ancla de upsell.</a:t>
+            <a:off x="731520" y="2514600"/>
+            <a:ext cx="4937760" cy="457200"/>
+          </a:xfrm>
+          <a:prstGeom prst="rect">
+            <a:avLst/>
+          </a:prstGeom>
+          <a:noFill/>
+        </p:spPr>
+        <p:txBody>
+          <a:bodyPr wrap="square" anchor="t" lIns="0" rIns="0" tIns="0" bIns="0">
+            <a:spAutoFit/>
+          </a:bodyPr>
+          <a:lstStyle/>
+          <a:p>
+            <a:pPr algn="l"/>
+            <a:r>
+              <a:rPr sz="1300" b="0" i="0">
+                <a:solidFill>
+                  <a:srgbClr val="1F2A33"/>
+                </a:solidFill>
+                <a:latin typeface="Calibri"/>
+              </a:rPr>
+              <a:t>Según tus MATRÍCULAS activas. Define escala, storage y soporte.</a:t>
             </a:r>
           </a:p>
         </p:txBody>
@@ -3295,37 +3458,29 @@
         </p:nvSpPr>
         <p:spPr>
           <a:xfrm>
-            <a:off x="868680" y="3383280"/>
-            <a:ext cx="10607040" cy="457200"/>
-          </a:xfrm>
-          <a:prstGeom prst="rect">
-            <a:avLst/>
-          </a:prstGeom>
-          <a:noFill/>
-        </p:spPr>
-        <p:txBody>
-          <a:bodyPr wrap="square" lIns="45720" rIns="45720" tIns="18288" bIns="18288">
-            <a:spAutoFit/>
-          </a:bodyPr>
-          <a:lstStyle/>
-          <a:p>
-            <a:r>
-              <a:rPr sz="1200" b="1" i="0">
-                <a:solidFill>
-                  <a:srgbClr val="059669"/>
-                </a:solidFill>
-                <a:latin typeface="Calibri"/>
-              </a:rPr>
-              <a:t>●  </a:t>
-            </a:r>
-            <a:r>
-              <a:rPr sz="1450" b="0" i="0">
-                <a:solidFill>
-                  <a:srgbClr val="1F2937"/>
-                </a:solidFill>
-                <a:latin typeface="Calibri"/>
-              </a:rPr>
-              <a:t>4 planes en escalera: Aula (gratis) → Esencial → Profesional → Institucional</a:t>
+            <a:off x="914400" y="3154680"/>
+            <a:ext cx="4754880" cy="365760"/>
+          </a:xfrm>
+          <a:prstGeom prst="rect">
+            <a:avLst/>
+          </a:prstGeom>
+          <a:noFill/>
+        </p:spPr>
+        <p:txBody>
+          <a:bodyPr wrap="square" anchor="t" lIns="0" rIns="0" tIns="0" bIns="0">
+            <a:spAutoFit/>
+          </a:bodyPr>
+          <a:lstStyle/>
+          <a:p>
+            <a:pPr algn="l"/>
+            <a:r>
+              <a:rPr sz="1300" b="0" i="0">
+                <a:solidFill>
+                  <a:srgbClr val="1F2A33"/>
+                </a:solidFill>
+                <a:latin typeface="Calibri"/>
+              </a:rPr>
+              <a:t>• Pequeña — hasta 1.000</a:t>
             </a:r>
           </a:p>
         </p:txBody>
@@ -3338,37 +3493,29 @@
         </p:nvSpPr>
         <p:spPr>
           <a:xfrm>
-            <a:off x="868680" y="3858768"/>
-            <a:ext cx="10607040" cy="457200"/>
-          </a:xfrm>
-          <a:prstGeom prst="rect">
-            <a:avLst/>
-          </a:prstGeom>
-          <a:noFill/>
-        </p:spPr>
-        <p:txBody>
-          <a:bodyPr wrap="square" lIns="45720" rIns="45720" tIns="18288" bIns="18288">
-            <a:spAutoFit/>
-          </a:bodyPr>
-          <a:lstStyle/>
-          <a:p>
-            <a:r>
-              <a:rPr sz="1200" b="1" i="0">
-                <a:solidFill>
-                  <a:srgbClr val="059669"/>
-                </a:solidFill>
-                <a:latin typeface="Calibri"/>
-              </a:rPr>
-              <a:t>●  </a:t>
-            </a:r>
-            <a:r>
-              <a:rPr sz="1450" b="0" i="0">
-                <a:solidFill>
-                  <a:srgbClr val="1F2937"/>
-                </a:solidFill>
-                <a:latin typeface="Calibri"/>
-              </a:rPr>
-              <a:t>Núcleo educativo siempre disponible; se gatea el valor agregado (IA, integridad, certificación, analítica)</a:t>
+            <a:off x="914400" y="3611880"/>
+            <a:ext cx="4754880" cy="365760"/>
+          </a:xfrm>
+          <a:prstGeom prst="rect">
+            <a:avLst/>
+          </a:prstGeom>
+          <a:noFill/>
+        </p:spPr>
+        <p:txBody>
+          <a:bodyPr wrap="square" anchor="t" lIns="0" rIns="0" tIns="0" bIns="0">
+            <a:spAutoFit/>
+          </a:bodyPr>
+          <a:lstStyle/>
+          <a:p>
+            <a:pPr algn="l"/>
+            <a:r>
+              <a:rPr sz="1300" b="0" i="0">
+                <a:solidFill>
+                  <a:srgbClr val="1F2A33"/>
+                </a:solidFill>
+                <a:latin typeface="Calibri"/>
+              </a:rPr>
+              <a:t>• Mediana — hasta 3.000</a:t>
             </a:r>
           </a:p>
         </p:txBody>
@@ -3381,86 +3528,126 @@
         </p:nvSpPr>
         <p:spPr>
           <a:xfrm>
-            <a:off x="868680" y="4334256"/>
-            <a:ext cx="10607040" cy="457200"/>
-          </a:xfrm>
-          <a:prstGeom prst="rect">
-            <a:avLst/>
-          </a:prstGeom>
-          <a:noFill/>
-        </p:spPr>
-        <p:txBody>
-          <a:bodyPr wrap="square" lIns="45720" rIns="45720" tIns="18288" bIns="18288">
-            <a:spAutoFit/>
-          </a:bodyPr>
-          <a:lstStyle/>
-          <a:p>
-            <a:r>
-              <a:rPr sz="1200" b="1" i="0">
-                <a:solidFill>
-                  <a:srgbClr val="059669"/>
-                </a:solidFill>
-                <a:latin typeface="Calibri"/>
-              </a:rPr>
-              <a:t>●  </a:t>
-            </a:r>
-            <a:r>
-              <a:rPr sz="1450" b="0" i="0">
-                <a:solidFill>
-                  <a:srgbClr val="1F2937"/>
-                </a:solidFill>
-                <a:latin typeface="Calibri"/>
-              </a:rPr>
-              <a:t>Se apalanca en module_visibility (gating de nav) + flags de entitlement server-side (IA/proctoring/code-runner)</a:t>
-            </a:r>
-          </a:p>
-        </p:txBody>
-      </p:sp>
-    </p:spTree>
-  </p:cSld>
-  <p:clrMapOvr>
-    <a:masterClrMapping/>
-  </p:clrMapOvr>
-</p:sld>
-</file>
-
-<file path=ppt/slides/slide2.xml><?xml version="1.0" encoding="utf-8"?>
-<p:sld xmlns:a="http://schemas.openxmlformats.org/drawingml/2006/main" xmlns:p="http://schemas.openxmlformats.org/presentationml/2006/main" xmlns:r="http://schemas.openxmlformats.org/officeDocument/2006/relationships">
-  <p:cSld>
-    <p:bg>
-      <p:bgPr>
-        <a:solidFill>
-          <a:srgbClr val="FFFFFF"/>
-        </a:solidFill>
-        <a:effectLst/>
-      </p:bgPr>
-    </p:bg>
-    <p:spTree>
-      <p:nvGrpSpPr>
-        <p:cNvPr id="1" name=""/>
-        <p:cNvGrpSpPr/>
-        <p:nvPr/>
-      </p:nvGrpSpPr>
-      <p:grpSpPr/>
-      <p:sp>
-        <p:nvSpPr>
-          <p:cNvPr id="2" name="Rectangle 1"/>
+            <a:off x="914400" y="4069080"/>
+            <a:ext cx="4754880" cy="365760"/>
+          </a:xfrm>
+          <a:prstGeom prst="rect">
+            <a:avLst/>
+          </a:prstGeom>
+          <a:noFill/>
+        </p:spPr>
+        <p:txBody>
+          <a:bodyPr wrap="square" anchor="t" lIns="0" rIns="0" tIns="0" bIns="0">
+            <a:spAutoFit/>
+          </a:bodyPr>
+          <a:lstStyle/>
+          <a:p>
+            <a:pPr algn="l"/>
+            <a:r>
+              <a:rPr sz="1300" b="0" i="0">
+                <a:solidFill>
+                  <a:srgbClr val="1F2A33"/>
+                </a:solidFill>
+                <a:latin typeface="Calibri"/>
+              </a:rPr>
+              <a:t>• Grande — hasta 10.000</a:t>
+            </a:r>
+          </a:p>
+        </p:txBody>
+      </p:sp>
+      <p:sp>
+        <p:nvSpPr>
+          <p:cNvPr id="10" name="TextBox 9"/>
+          <p:cNvSpPr txBox="1"/>
+          <p:nvPr/>
+        </p:nvSpPr>
+        <p:spPr>
+          <a:xfrm>
+            <a:off x="914400" y="4526280"/>
+            <a:ext cx="4754880" cy="365760"/>
+          </a:xfrm>
+          <a:prstGeom prst="rect">
+            <a:avLst/>
+          </a:prstGeom>
+          <a:noFill/>
+        </p:spPr>
+        <p:txBody>
+          <a:bodyPr wrap="square" anchor="t" lIns="0" rIns="0" tIns="0" bIns="0">
+            <a:spAutoFit/>
+          </a:bodyPr>
+          <a:lstStyle/>
+          <a:p>
+            <a:pPr algn="l"/>
+            <a:r>
+              <a:rPr sz="1300" b="0" i="0">
+                <a:solidFill>
+                  <a:srgbClr val="1F2A33"/>
+                </a:solidFill>
+                <a:latin typeface="Calibri"/>
+              </a:rPr>
+              <a:t>• Enterprise — a medida</a:t>
+            </a:r>
+          </a:p>
+        </p:txBody>
+      </p:sp>
+      <p:sp>
+        <p:nvSpPr>
+          <p:cNvPr id="11" name="TextBox 10"/>
+          <p:cNvSpPr txBox="1"/>
+          <p:nvPr/>
+        </p:nvSpPr>
+        <p:spPr>
+          <a:xfrm>
+            <a:off x="914400" y="4983480"/>
+            <a:ext cx="4754880" cy="365760"/>
+          </a:xfrm>
+          <a:prstGeom prst="rect">
+            <a:avLst/>
+          </a:prstGeom>
+          <a:noFill/>
+        </p:spPr>
+        <p:txBody>
+          <a:bodyPr wrap="square" anchor="t" lIns="0" rIns="0" tIns="0" bIns="0">
+            <a:spAutoFit/>
+          </a:bodyPr>
+          <a:lstStyle/>
+          <a:p>
+            <a:pPr algn="l"/>
+            <a:r>
+              <a:rPr sz="1300" b="0" i="1">
+                <a:solidFill>
+                  <a:srgbClr val="647480"/>
+                </a:solidFill>
+                <a:latin typeface="Calibri"/>
+              </a:rPr>
+              <a:t>• (Starter $79 solo para pilotos ≤200)</a:t>
+            </a:r>
+          </a:p>
+        </p:txBody>
+      </p:sp>
+      <p:sp>
+        <p:nvSpPr>
+          <p:cNvPr id="12" name="Rounded Rectangle 11"/>
           <p:cNvSpPr/>
           <p:nvPr/>
         </p:nvSpPr>
         <p:spPr>
           <a:xfrm>
-            <a:off x="0" y="0"/>
-            <a:ext cx="12191695" cy="1051560"/>
-          </a:xfrm>
-          <a:prstGeom prst="rect">
-            <a:avLst/>
+            <a:off x="6245352" y="1737360"/>
+            <a:ext cx="5486400" cy="4023360"/>
+          </a:xfrm>
+          <a:prstGeom prst="roundRect">
+            <a:avLst>
+              <a:gd name="adj" fmla="val 5000"/>
+            </a:avLst>
           </a:prstGeom>
           <a:solidFill>
-            <a:srgbClr val="7C3AED"/>
+            <a:srgbClr val="FFFFFF"/>
           </a:solidFill>
-          <a:ln>
-            <a:noFill/>
+          <a:ln w="12700">
+            <a:solidFill>
+              <a:srgbClr val="D0D9E1"/>
+            </a:solidFill>
           </a:ln>
           <a:effectLst/>
         </p:spPr>
@@ -3488,20 +3675,460 @@
       </p:sp>
       <p:sp>
         <p:nvSpPr>
-          <p:cNvPr id="3" name="Rectangle 2"/>
+          <p:cNvPr id="13" name="TextBox 12"/>
+          <p:cNvSpPr txBox="1"/>
+          <p:nvPr/>
+        </p:nvSpPr>
+        <p:spPr>
+          <a:xfrm>
+            <a:off x="6519672" y="1965960"/>
+            <a:ext cx="4937760" cy="457200"/>
+          </a:xfrm>
+          <a:prstGeom prst="rect">
+            <a:avLst/>
+          </a:prstGeom>
+          <a:noFill/>
+        </p:spPr>
+        <p:txBody>
+          <a:bodyPr wrap="square" anchor="t" lIns="0" rIns="0" tIns="0" bIns="0">
+            <a:spAutoFit/>
+          </a:bodyPr>
+          <a:lstStyle/>
+          <a:p>
+            <a:pPr algn="l"/>
+            <a:r>
+              <a:rPr sz="1800" b="1" i="0">
+                <a:solidFill>
+                  <a:srgbClr val="0F3E4C"/>
+                </a:solidFill>
+                <a:latin typeface="Calibri"/>
+              </a:rPr>
+              <a:t>2 · Add-ons (opcionales, a la carta)</a:t>
+            </a:r>
+          </a:p>
+        </p:txBody>
+      </p:sp>
+      <p:sp>
+        <p:nvSpPr>
+          <p:cNvPr id="14" name="TextBox 13"/>
+          <p:cNvSpPr txBox="1"/>
+          <p:nvPr/>
+        </p:nvSpPr>
+        <p:spPr>
+          <a:xfrm>
+            <a:off x="6702552" y="2606040"/>
+            <a:ext cx="4754880" cy="365760"/>
+          </a:xfrm>
+          <a:prstGeom prst="rect">
+            <a:avLst/>
+          </a:prstGeom>
+          <a:noFill/>
+        </p:spPr>
+        <p:txBody>
+          <a:bodyPr wrap="square" anchor="t" lIns="0" rIns="0" tIns="0" bIns="0">
+            <a:spAutoFit/>
+          </a:bodyPr>
+          <a:lstStyle/>
+          <a:p>
+            <a:pPr algn="l"/>
+            <a:r>
+              <a:rPr sz="1300" b="0" i="0">
+                <a:solidFill>
+                  <a:srgbClr val="1F2A33"/>
+                </a:solidFill>
+                <a:latin typeface="Calibri"/>
+              </a:rPr>
+              <a:t>+ IA administrada — $0,10/matrícula</a:t>
+            </a:r>
+          </a:p>
+        </p:txBody>
+      </p:sp>
+      <p:sp>
+        <p:nvSpPr>
+          <p:cNvPr id="15" name="TextBox 14"/>
+          <p:cNvSpPr txBox="1"/>
+          <p:nvPr/>
+        </p:nvSpPr>
+        <p:spPr>
+          <a:xfrm>
+            <a:off x="6702552" y="3081528"/>
+            <a:ext cx="4754880" cy="365760"/>
+          </a:xfrm>
+          <a:prstGeom prst="rect">
+            <a:avLst/>
+          </a:prstGeom>
+          <a:noFill/>
+        </p:spPr>
+        <p:txBody>
+          <a:bodyPr wrap="square" anchor="t" lIns="0" rIns="0" tIns="0" bIns="0">
+            <a:spAutoFit/>
+          </a:bodyPr>
+          <a:lstStyle/>
+          <a:p>
+            <a:pPr algn="l"/>
+            <a:r>
+              <a:rPr sz="1300" b="0" i="0">
+                <a:solidFill>
+                  <a:srgbClr val="1F2A33"/>
+                </a:solidFill>
+                <a:latin typeface="Calibri"/>
+              </a:rPr>
+              <a:t>+ Storage extra — $10 / 100 GB</a:t>
+            </a:r>
+          </a:p>
+        </p:txBody>
+      </p:sp>
+      <p:sp>
+        <p:nvSpPr>
+          <p:cNvPr id="16" name="TextBox 15"/>
+          <p:cNvSpPr txBox="1"/>
+          <p:nvPr/>
+        </p:nvSpPr>
+        <p:spPr>
+          <a:xfrm>
+            <a:off x="6702552" y="3557016"/>
+            <a:ext cx="4754880" cy="365760"/>
+          </a:xfrm>
+          <a:prstGeom prst="rect">
+            <a:avLst/>
+          </a:prstGeom>
+          <a:noFill/>
+        </p:spPr>
+        <p:txBody>
+          <a:bodyPr wrap="square" anchor="t" lIns="0" rIns="0" tIns="0" bIns="0">
+            <a:spAutoFit/>
+          </a:bodyPr>
+          <a:lstStyle/>
+          <a:p>
+            <a:pPr algn="l"/>
+            <a:r>
+              <a:rPr sz="1300" b="0" i="0">
+                <a:solidFill>
+                  <a:srgbClr val="1F2A33"/>
+                </a:solidFill>
+                <a:latin typeface="Calibri"/>
+              </a:rPr>
+              <a:t>+ Code runner (Java/Python) — $49</a:t>
+            </a:r>
+          </a:p>
+        </p:txBody>
+      </p:sp>
+      <p:sp>
+        <p:nvSpPr>
+          <p:cNvPr id="17" name="TextBox 16"/>
+          <p:cNvSpPr txBox="1"/>
+          <p:nvPr/>
+        </p:nvSpPr>
+        <p:spPr>
+          <a:xfrm>
+            <a:off x="6702552" y="4032504"/>
+            <a:ext cx="4754880" cy="365760"/>
+          </a:xfrm>
+          <a:prstGeom prst="rect">
+            <a:avLst/>
+          </a:prstGeom>
+          <a:noFill/>
+        </p:spPr>
+        <p:txBody>
+          <a:bodyPr wrap="square" anchor="t" lIns="0" rIns="0" tIns="0" bIns="0">
+            <a:spAutoFit/>
+          </a:bodyPr>
+          <a:lstStyle/>
+          <a:p>
+            <a:pPr algn="l"/>
+            <a:r>
+              <a:rPr sz="1300" b="0" i="0">
+                <a:solidFill>
+                  <a:srgbClr val="1F2A33"/>
+                </a:solidFill>
+                <a:latin typeface="Calibri"/>
+              </a:rPr>
+              <a:t>+ Aislamiento dedicado — $99</a:t>
+            </a:r>
+          </a:p>
+        </p:txBody>
+      </p:sp>
+      <p:sp>
+        <p:nvSpPr>
+          <p:cNvPr id="18" name="TextBox 17"/>
+          <p:cNvSpPr txBox="1"/>
+          <p:nvPr/>
+        </p:nvSpPr>
+        <p:spPr>
+          <a:xfrm>
+            <a:off x="6702552" y="4507992"/>
+            <a:ext cx="4754880" cy="365760"/>
+          </a:xfrm>
+          <a:prstGeom prst="rect">
+            <a:avLst/>
+          </a:prstGeom>
+          <a:noFill/>
+        </p:spPr>
+        <p:txBody>
+          <a:bodyPr wrap="square" anchor="t" lIns="0" rIns="0" tIns="0" bIns="0">
+            <a:spAutoFit/>
+          </a:bodyPr>
+          <a:lstStyle/>
+          <a:p>
+            <a:pPr algn="l"/>
+            <a:r>
+              <a:rPr sz="1300" b="0" i="0">
+                <a:solidFill>
+                  <a:srgbClr val="1F2A33"/>
+                </a:solidFill>
+                <a:latin typeface="Calibri"/>
+              </a:rPr>
+              <a:t>+ SSO / SAML — $29 (+$99 setup)</a:t>
+            </a:r>
+          </a:p>
+        </p:txBody>
+      </p:sp>
+      <p:sp>
+        <p:nvSpPr>
+          <p:cNvPr id="19" name="TextBox 18"/>
+          <p:cNvSpPr txBox="1"/>
+          <p:nvPr/>
+        </p:nvSpPr>
+        <p:spPr>
+          <a:xfrm>
+            <a:off x="6702552" y="4983480"/>
+            <a:ext cx="4754880" cy="365760"/>
+          </a:xfrm>
+          <a:prstGeom prst="rect">
+            <a:avLst/>
+          </a:prstGeom>
+          <a:noFill/>
+        </p:spPr>
+        <p:txBody>
+          <a:bodyPr wrap="square" anchor="t" lIns="0" rIns="0" tIns="0" bIns="0">
+            <a:spAutoFit/>
+          </a:bodyPr>
+          <a:lstStyle/>
+          <a:p>
+            <a:pPr algn="l"/>
+            <a:r>
+              <a:rPr sz="1300" b="0" i="0">
+                <a:solidFill>
+                  <a:srgbClr val="1F2A33"/>
+                </a:solidFill>
+                <a:latin typeface="Calibri"/>
+              </a:rPr>
+              <a:t>+ Certificación oficial — $29</a:t>
+            </a:r>
+          </a:p>
+        </p:txBody>
+      </p:sp>
+      <p:sp>
+        <p:nvSpPr>
+          <p:cNvPr id="20" name="TextBox 19"/>
+          <p:cNvSpPr txBox="1"/>
+          <p:nvPr/>
+        </p:nvSpPr>
+        <p:spPr>
+          <a:xfrm>
+            <a:off x="457200" y="5989320"/>
+            <a:ext cx="11247120" cy="365760"/>
+          </a:xfrm>
+          <a:prstGeom prst="rect">
+            <a:avLst/>
+          </a:prstGeom>
+          <a:noFill/>
+        </p:spPr>
+        <p:txBody>
+          <a:bodyPr wrap="square" anchor="t" lIns="0" rIns="0" tIns="0" bIns="0">
+            <a:spAutoFit/>
+          </a:bodyPr>
+          <a:lstStyle/>
+          <a:p>
+            <a:pPr algn="ctr"/>
+            <a:r>
+              <a:rPr sz="1200" b="0" i="1">
+                <a:solidFill>
+                  <a:srgbClr val="0F3E4C"/>
+                </a:solidFill>
+                <a:latin typeface="Calibri"/>
+              </a:rPr>
+              <a:t>No hay plan Free. La IA va con tu propia clave (BYO): sin recargo de IA en la suscripción.</a:t>
+            </a:r>
+          </a:p>
+        </p:txBody>
+      </p:sp>
+      <p:sp>
+        <p:nvSpPr>
+          <p:cNvPr id="21" name="TextBox 20"/>
+          <p:cNvSpPr txBox="1"/>
+          <p:nvPr/>
+        </p:nvSpPr>
+        <p:spPr>
+          <a:xfrm>
+            <a:off x="457200" y="6492240"/>
+            <a:ext cx="7315200" cy="274320"/>
+          </a:xfrm>
+          <a:prstGeom prst="rect">
+            <a:avLst/>
+          </a:prstGeom>
+          <a:noFill/>
+        </p:spPr>
+        <p:txBody>
+          <a:bodyPr wrap="square" anchor="t" lIns="0" rIns="0" tIns="0" bIns="0">
+            <a:spAutoFit/>
+          </a:bodyPr>
+          <a:lstStyle/>
+          <a:p>
+            <a:pPr algn="l"/>
+            <a:r>
+              <a:rPr sz="900" b="0" i="0">
+                <a:solidFill>
+                  <a:srgbClr val="647480"/>
+                </a:solidFill>
+                <a:latin typeface="Calibri"/>
+              </a:rPr>
+              <a:t>ExamLab · Modelo modular — planes + add-ons</a:t>
+            </a:r>
+          </a:p>
+        </p:txBody>
+      </p:sp>
+      <p:sp>
+        <p:nvSpPr>
+          <p:cNvPr id="22" name="TextBox 21"/>
+          <p:cNvSpPr txBox="1"/>
+          <p:nvPr/>
+        </p:nvSpPr>
+        <p:spPr>
+          <a:xfrm>
+            <a:off x="11430000" y="6492240"/>
+            <a:ext cx="457200" cy="274320"/>
+          </a:xfrm>
+          <a:prstGeom prst="rect">
+            <a:avLst/>
+          </a:prstGeom>
+          <a:noFill/>
+        </p:spPr>
+        <p:txBody>
+          <a:bodyPr wrap="square" anchor="t" lIns="0" rIns="0" tIns="0" bIns="0">
+            <a:spAutoFit/>
+          </a:bodyPr>
+          <a:lstStyle/>
+          <a:p>
+            <a:pPr algn="r"/>
+            <a:r>
+              <a:rPr sz="900" b="0" i="0">
+                <a:solidFill>
+                  <a:srgbClr val="647480"/>
+                </a:solidFill>
+                <a:latin typeface="Calibri"/>
+              </a:rPr>
+              <a:t>2</a:t>
+            </a:r>
+          </a:p>
+        </p:txBody>
+      </p:sp>
+    </p:spTree>
+  </p:cSld>
+  <p:clrMapOvr>
+    <a:masterClrMapping/>
+  </p:clrMapOvr>
+</p:sld>
+</file>
+
+<file path=ppt/slides/slide3.xml><?xml version="1.0" encoding="utf-8"?>
+<p:sld xmlns:a="http://schemas.openxmlformats.org/drawingml/2006/main" xmlns:p="http://schemas.openxmlformats.org/presentationml/2006/main" xmlns:r="http://schemas.openxmlformats.org/officeDocument/2006/relationships">
+  <p:cSld>
+    <p:spTree>
+      <p:nvGrpSpPr>
+        <p:cNvPr id="1" name=""/>
+        <p:cNvGrpSpPr/>
+        <p:nvPr/>
+      </p:nvGrpSpPr>
+      <p:grpSpPr/>
+      <p:sp>
+        <p:nvSpPr>
+          <p:cNvPr id="2" name="TextBox 1"/>
+          <p:cNvSpPr txBox="1"/>
+          <p:nvPr/>
+        </p:nvSpPr>
+        <p:spPr>
+          <a:xfrm>
+            <a:off x="457200" y="365760"/>
+            <a:ext cx="10972800" cy="365760"/>
+          </a:xfrm>
+          <a:prstGeom prst="rect">
+            <a:avLst/>
+          </a:prstGeom>
+          <a:noFill/>
+        </p:spPr>
+        <p:txBody>
+          <a:bodyPr wrap="square" anchor="t" lIns="0" rIns="0" tIns="0" bIns="0">
+            <a:spAutoFit/>
+          </a:bodyPr>
+          <a:lstStyle/>
+          <a:p>
+            <a:pPr algn="l"/>
+            <a:r>
+              <a:rPr sz="1200" b="1" i="0">
+                <a:solidFill>
+                  <a:srgbClr val="2EB8C7"/>
+                </a:solidFill>
+                <a:latin typeface="Calibri"/>
+              </a:rPr>
+              <a:t>PLANES BASE</a:t>
+            </a:r>
+          </a:p>
+        </p:txBody>
+      </p:sp>
+      <p:sp>
+        <p:nvSpPr>
+          <p:cNvPr id="3" name="TextBox 2"/>
+          <p:cNvSpPr txBox="1"/>
+          <p:nvPr/>
+        </p:nvSpPr>
+        <p:spPr>
+          <a:xfrm>
+            <a:off x="457200" y="713232"/>
+            <a:ext cx="11247120" cy="731520"/>
+          </a:xfrm>
+          <a:prstGeom prst="rect">
+            <a:avLst/>
+          </a:prstGeom>
+          <a:noFill/>
+        </p:spPr>
+        <p:txBody>
+          <a:bodyPr wrap="square" anchor="t" lIns="0" rIns="0" tIns="0" bIns="0">
+            <a:spAutoFit/>
+          </a:bodyPr>
+          <a:lstStyle/>
+          <a:p>
+            <a:pPr algn="l"/>
+            <a:r>
+              <a:rPr sz="3000" b="1" i="0">
+                <a:solidFill>
+                  <a:srgbClr val="0F3E4C"/>
+                </a:solidFill>
+                <a:latin typeface="Calibri"/>
+              </a:rPr>
+              <a:t>Elige por tamaño — sin versión gratuita</a:t>
+            </a:r>
+          </a:p>
+        </p:txBody>
+      </p:sp>
+      <p:sp>
+        <p:nvSpPr>
+          <p:cNvPr id="4" name="Rounded Rectangle 3"/>
           <p:cNvSpPr/>
           <p:nvPr/>
         </p:nvSpPr>
         <p:spPr>
           <a:xfrm>
-            <a:off x="0" y="1051560"/>
-            <a:ext cx="12191695" cy="54864"/>
-          </a:xfrm>
-          <a:prstGeom prst="rect">
-            <a:avLst/>
+            <a:off x="457200" y="1828800"/>
+            <a:ext cx="11247120" cy="566928"/>
+          </a:xfrm>
+          <a:prstGeom prst="roundRect">
+            <a:avLst>
+              <a:gd name="adj" fmla="val 5000"/>
+            </a:avLst>
           </a:prstGeom>
           <a:solidFill>
-            <a:srgbClr val="059669"/>
+            <a:srgbClr val="147A8C"/>
           </a:solidFill>
           <a:ln>
             <a:noFill/>
@@ -3532,95 +4159,165 @@
       </p:sp>
       <p:sp>
         <p:nvSpPr>
-          <p:cNvPr id="4" name="TextBox 3"/>
-          <p:cNvSpPr txBox="1"/>
-          <p:nvPr/>
-        </p:nvSpPr>
-        <p:spPr>
-          <a:xfrm>
-            <a:off x="457200" y="146304"/>
-            <a:ext cx="11247120" cy="274320"/>
-          </a:xfrm>
-          <a:prstGeom prst="rect">
-            <a:avLst/>
-          </a:prstGeom>
-          <a:noFill/>
-        </p:spPr>
-        <p:txBody>
-          <a:bodyPr wrap="square" lIns="45720" rIns="45720" tIns="18288" bIns="18288">
-            <a:spAutoFit/>
-          </a:bodyPr>
-          <a:lstStyle/>
-          <a:p>
-            <a:r>
-              <a:rPr sz="1100" b="1" i="0">
-                <a:solidFill>
-                  <a:srgbClr val="E9D5FF"/>
-                </a:solidFill>
-                <a:latin typeface="Calibri"/>
-              </a:rPr>
-              <a:t>MODELO MODULAR</a:t>
-            </a:r>
-          </a:p>
-        </p:txBody>
-      </p:sp>
-      <p:sp>
-        <p:nvSpPr>
           <p:cNvPr id="5" name="TextBox 4"/>
           <p:cNvSpPr txBox="1"/>
           <p:nvPr/>
         </p:nvSpPr>
         <p:spPr>
           <a:xfrm>
-            <a:off x="457200" y="384048"/>
-            <a:ext cx="11247120" cy="502920"/>
-          </a:xfrm>
-          <a:prstGeom prst="rect">
-            <a:avLst/>
-          </a:prstGeom>
-          <a:noFill/>
-        </p:spPr>
-        <p:txBody>
-          <a:bodyPr wrap="square" lIns="45720" rIns="45720" tIns="18288" bIns="18288">
-            <a:spAutoFit/>
-          </a:bodyPr>
-          <a:lstStyle/>
-          <a:p>
-            <a:r>
-              <a:rPr sz="2300" b="1" i="0">
+            <a:off x="640080" y="1828800"/>
+            <a:ext cx="3474720" cy="566928"/>
+          </a:xfrm>
+          <a:prstGeom prst="rect">
+            <a:avLst/>
+          </a:prstGeom>
+          <a:noFill/>
+        </p:spPr>
+        <p:txBody>
+          <a:bodyPr wrap="square" anchor="ctr" lIns="0" rIns="0" tIns="0" bIns="0">
+            <a:spAutoFit/>
+          </a:bodyPr>
+          <a:lstStyle/>
+          <a:p>
+            <a:pPr algn="l"/>
+            <a:r>
+              <a:rPr sz="1300" b="1" i="0">
                 <a:solidFill>
                   <a:srgbClr val="FFFFFF"/>
                 </a:solidFill>
                 <a:latin typeface="Calibri"/>
               </a:rPr>
-              <a:t>Cuatro planes: cada uno desbloquea más capacidad</a:t>
-            </a:r>
-          </a:p>
-        </p:txBody>
-      </p:sp>
-      <p:sp>
-        <p:nvSpPr>
-          <p:cNvPr id="6" name="Rounded Rectangle 5"/>
+              <a:t>Plan</a:t>
+            </a:r>
+          </a:p>
+        </p:txBody>
+      </p:sp>
+      <p:sp>
+        <p:nvSpPr>
+          <p:cNvPr id="6" name="TextBox 5"/>
+          <p:cNvSpPr txBox="1"/>
+          <p:nvPr/>
+        </p:nvSpPr>
+        <p:spPr>
+          <a:xfrm>
+            <a:off x="4297680" y="1828800"/>
+            <a:ext cx="2103120" cy="566928"/>
+          </a:xfrm>
+          <a:prstGeom prst="rect">
+            <a:avLst/>
+          </a:prstGeom>
+          <a:noFill/>
+        </p:spPr>
+        <p:txBody>
+          <a:bodyPr wrap="square" anchor="ctr" lIns="0" rIns="0" tIns="0" bIns="0">
+            <a:spAutoFit/>
+          </a:bodyPr>
+          <a:lstStyle/>
+          <a:p>
+            <a:pPr algn="l"/>
+            <a:r>
+              <a:rPr sz="1300" b="1" i="0">
+                <a:solidFill>
+                  <a:srgbClr val="FFFFFF"/>
+                </a:solidFill>
+                <a:latin typeface="Calibri"/>
+              </a:rPr>
+              <a:t>Matrículas</a:t>
+            </a:r>
+          </a:p>
+        </p:txBody>
+      </p:sp>
+      <p:sp>
+        <p:nvSpPr>
+          <p:cNvPr id="7" name="TextBox 6"/>
+          <p:cNvSpPr txBox="1"/>
+          <p:nvPr/>
+        </p:nvSpPr>
+        <p:spPr>
+          <a:xfrm>
+            <a:off x="6583680" y="1828800"/>
+            <a:ext cx="2103120" cy="566928"/>
+          </a:xfrm>
+          <a:prstGeom prst="rect">
+            <a:avLst/>
+          </a:prstGeom>
+          <a:noFill/>
+        </p:spPr>
+        <p:txBody>
+          <a:bodyPr wrap="square" anchor="ctr" lIns="0" rIns="0" tIns="0" bIns="0">
+            <a:spAutoFit/>
+          </a:bodyPr>
+          <a:lstStyle/>
+          <a:p>
+            <a:pPr algn="l"/>
+            <a:r>
+              <a:rPr sz="1300" b="1" i="0">
+                <a:solidFill>
+                  <a:srgbClr val="FFFFFF"/>
+                </a:solidFill>
+                <a:latin typeface="Calibri"/>
+              </a:rPr>
+              <a:t>Storage</a:t>
+            </a:r>
+          </a:p>
+        </p:txBody>
+      </p:sp>
+      <p:sp>
+        <p:nvSpPr>
+          <p:cNvPr id="8" name="TextBox 7"/>
+          <p:cNvSpPr txBox="1"/>
+          <p:nvPr/>
+        </p:nvSpPr>
+        <p:spPr>
+          <a:xfrm>
+            <a:off x="8961120" y="1828800"/>
+            <a:ext cx="2560320" cy="566928"/>
+          </a:xfrm>
+          <a:prstGeom prst="rect">
+            <a:avLst/>
+          </a:prstGeom>
+          <a:noFill/>
+        </p:spPr>
+        <p:txBody>
+          <a:bodyPr wrap="square" anchor="ctr" lIns="0" rIns="0" tIns="0" bIns="0">
+            <a:spAutoFit/>
+          </a:bodyPr>
+          <a:lstStyle/>
+          <a:p>
+            <a:pPr algn="l"/>
+            <a:r>
+              <a:rPr sz="1300" b="1" i="0">
+                <a:solidFill>
+                  <a:srgbClr val="FFFFFF"/>
+                </a:solidFill>
+                <a:latin typeface="Calibri"/>
+              </a:rPr>
+              <a:t>Precio</a:t>
+            </a:r>
+          </a:p>
+        </p:txBody>
+      </p:sp>
+      <p:sp>
+        <p:nvSpPr>
+          <p:cNvPr id="9" name="Rounded Rectangle 8"/>
           <p:cNvSpPr/>
           <p:nvPr/>
         </p:nvSpPr>
         <p:spPr>
           <a:xfrm>
-            <a:off x="384048" y="1371600"/>
-            <a:ext cx="2715768" cy="5074920"/>
+            <a:off x="457200" y="2468880"/>
+            <a:ext cx="11247120" cy="566928"/>
           </a:xfrm>
           <a:prstGeom prst="roundRect">
             <a:avLst>
-              <a:gd name="adj" fmla="val 4000"/>
+              <a:gd name="adj" fmla="val 5000"/>
             </a:avLst>
           </a:prstGeom>
           <a:solidFill>
-            <a:srgbClr val="F9FAFB"/>
+            <a:srgbClr val="F4F8FA"/>
           </a:solidFill>
-          <a:ln w="12700">
-            <a:solidFill>
-              <a:srgbClr val="E5E7EB"/>
-            </a:solidFill>
+          <a:ln>
+            <a:noFill/>
           </a:ln>
           <a:effectLst/>
         </p:spPr>
@@ -3648,22 +4345,162 @@
       </p:sp>
       <p:sp>
         <p:nvSpPr>
-          <p:cNvPr id="7" name="Rounded Rectangle 6"/>
+          <p:cNvPr id="10" name="TextBox 9"/>
+          <p:cNvSpPr txBox="1"/>
+          <p:nvPr/>
+        </p:nvSpPr>
+        <p:spPr>
+          <a:xfrm>
+            <a:off x="640080" y="2468880"/>
+            <a:ext cx="3474720" cy="566928"/>
+          </a:xfrm>
+          <a:prstGeom prst="rect">
+            <a:avLst/>
+          </a:prstGeom>
+          <a:noFill/>
+        </p:spPr>
+        <p:txBody>
+          <a:bodyPr wrap="square" anchor="ctr" lIns="0" rIns="0" tIns="0" bIns="0">
+            <a:spAutoFit/>
+          </a:bodyPr>
+          <a:lstStyle/>
+          <a:p>
+            <a:pPr algn="l"/>
+            <a:r>
+              <a:rPr sz="1300" b="1" i="0">
+                <a:solidFill>
+                  <a:srgbClr val="1F2A33"/>
+                </a:solidFill>
+                <a:latin typeface="Calibri"/>
+              </a:rPr>
+              <a:t>Starter (piloto)</a:t>
+            </a:r>
+          </a:p>
+        </p:txBody>
+      </p:sp>
+      <p:sp>
+        <p:nvSpPr>
+          <p:cNvPr id="11" name="TextBox 10"/>
+          <p:cNvSpPr txBox="1"/>
+          <p:nvPr/>
+        </p:nvSpPr>
+        <p:spPr>
+          <a:xfrm>
+            <a:off x="4297680" y="2468880"/>
+            <a:ext cx="2103120" cy="566928"/>
+          </a:xfrm>
+          <a:prstGeom prst="rect">
+            <a:avLst/>
+          </a:prstGeom>
+          <a:noFill/>
+        </p:spPr>
+        <p:txBody>
+          <a:bodyPr wrap="square" anchor="ctr" lIns="0" rIns="0" tIns="0" bIns="0">
+            <a:spAutoFit/>
+          </a:bodyPr>
+          <a:lstStyle/>
+          <a:p>
+            <a:pPr algn="l"/>
+            <a:r>
+              <a:rPr sz="1300" b="0" i="0">
+                <a:solidFill>
+                  <a:srgbClr val="1F2A33"/>
+                </a:solidFill>
+                <a:latin typeface="Calibri"/>
+              </a:rPr>
+              <a:t>≤200</a:t>
+            </a:r>
+          </a:p>
+        </p:txBody>
+      </p:sp>
+      <p:sp>
+        <p:nvSpPr>
+          <p:cNvPr id="12" name="TextBox 11"/>
+          <p:cNvSpPr txBox="1"/>
+          <p:nvPr/>
+        </p:nvSpPr>
+        <p:spPr>
+          <a:xfrm>
+            <a:off x="6583680" y="2468880"/>
+            <a:ext cx="2103120" cy="566928"/>
+          </a:xfrm>
+          <a:prstGeom prst="rect">
+            <a:avLst/>
+          </a:prstGeom>
+          <a:noFill/>
+        </p:spPr>
+        <p:txBody>
+          <a:bodyPr wrap="square" anchor="ctr" lIns="0" rIns="0" tIns="0" bIns="0">
+            <a:spAutoFit/>
+          </a:bodyPr>
+          <a:lstStyle/>
+          <a:p>
+            <a:pPr algn="l"/>
+            <a:r>
+              <a:rPr sz="1300" b="0" i="0">
+                <a:solidFill>
+                  <a:srgbClr val="1F2A33"/>
+                </a:solidFill>
+                <a:latin typeface="Calibri"/>
+              </a:rPr>
+              <a:t>20 GB</a:t>
+            </a:r>
+          </a:p>
+        </p:txBody>
+      </p:sp>
+      <p:sp>
+        <p:nvSpPr>
+          <p:cNvPr id="13" name="TextBox 12"/>
+          <p:cNvSpPr txBox="1"/>
+          <p:nvPr/>
+        </p:nvSpPr>
+        <p:spPr>
+          <a:xfrm>
+            <a:off x="8961120" y="2468880"/>
+            <a:ext cx="2560320" cy="566928"/>
+          </a:xfrm>
+          <a:prstGeom prst="rect">
+            <a:avLst/>
+          </a:prstGeom>
+          <a:noFill/>
+        </p:spPr>
+        <p:txBody>
+          <a:bodyPr wrap="square" anchor="ctr" lIns="0" rIns="0" tIns="0" bIns="0">
+            <a:spAutoFit/>
+          </a:bodyPr>
+          <a:lstStyle/>
+          <a:p>
+            <a:pPr algn="l"/>
+            <a:r>
+              <a:rPr sz="1300" b="1" i="0">
+                <a:solidFill>
+                  <a:srgbClr val="0F3E4C"/>
+                </a:solidFill>
+                <a:latin typeface="Calibri"/>
+              </a:rPr>
+              <a:t>$79</a:t>
+            </a:r>
+          </a:p>
+        </p:txBody>
+      </p:sp>
+      <p:sp>
+        <p:nvSpPr>
+          <p:cNvPr id="14" name="Rounded Rectangle 13"/>
           <p:cNvSpPr/>
           <p:nvPr/>
         </p:nvSpPr>
         <p:spPr>
           <a:xfrm>
-            <a:off x="384048" y="1371600"/>
-            <a:ext cx="2715768" cy="566928"/>
+            <a:off x="457200" y="3108960"/>
+            <a:ext cx="11247120" cy="566928"/>
           </a:xfrm>
           <a:prstGeom prst="roundRect">
             <a:avLst>
-              <a:gd name="adj" fmla="val 6000"/>
+              <a:gd name="adj" fmla="val 5000"/>
             </a:avLst>
           </a:prstGeom>
           <a:solidFill>
-            <a:srgbClr val="6B7280"/>
+            <a:srgbClr val="F4F8FA"/>
           </a:solidFill>
           <a:ln>
             <a:noFill/>
@@ -3694,20 +4531,162 @@
       </p:sp>
       <p:sp>
         <p:nvSpPr>
-          <p:cNvPr id="8" name="Rectangle 7"/>
+          <p:cNvPr id="15" name="TextBox 14"/>
+          <p:cNvSpPr txBox="1"/>
+          <p:nvPr/>
+        </p:nvSpPr>
+        <p:spPr>
+          <a:xfrm>
+            <a:off x="640080" y="3108960"/>
+            <a:ext cx="3474720" cy="566928"/>
+          </a:xfrm>
+          <a:prstGeom prst="rect">
+            <a:avLst/>
+          </a:prstGeom>
+          <a:noFill/>
+        </p:spPr>
+        <p:txBody>
+          <a:bodyPr wrap="square" anchor="ctr" lIns="0" rIns="0" tIns="0" bIns="0">
+            <a:spAutoFit/>
+          </a:bodyPr>
+          <a:lstStyle/>
+          <a:p>
+            <a:pPr algn="l"/>
+            <a:r>
+              <a:rPr sz="1300" b="1" i="0">
+                <a:solidFill>
+                  <a:srgbClr val="1F2A33"/>
+                </a:solidFill>
+                <a:latin typeface="Calibri"/>
+              </a:rPr>
+              <a:t>Pequeña</a:t>
+            </a:r>
+          </a:p>
+        </p:txBody>
+      </p:sp>
+      <p:sp>
+        <p:nvSpPr>
+          <p:cNvPr id="16" name="TextBox 15"/>
+          <p:cNvSpPr txBox="1"/>
+          <p:nvPr/>
+        </p:nvSpPr>
+        <p:spPr>
+          <a:xfrm>
+            <a:off x="4297680" y="3108960"/>
+            <a:ext cx="2103120" cy="566928"/>
+          </a:xfrm>
+          <a:prstGeom prst="rect">
+            <a:avLst/>
+          </a:prstGeom>
+          <a:noFill/>
+        </p:spPr>
+        <p:txBody>
+          <a:bodyPr wrap="square" anchor="ctr" lIns="0" rIns="0" tIns="0" bIns="0">
+            <a:spAutoFit/>
+          </a:bodyPr>
+          <a:lstStyle/>
+          <a:p>
+            <a:pPr algn="l"/>
+            <a:r>
+              <a:rPr sz="1300" b="0" i="0">
+                <a:solidFill>
+                  <a:srgbClr val="1F2A33"/>
+                </a:solidFill>
+                <a:latin typeface="Calibri"/>
+              </a:rPr>
+              <a:t>≤1.000</a:t>
+            </a:r>
+          </a:p>
+        </p:txBody>
+      </p:sp>
+      <p:sp>
+        <p:nvSpPr>
+          <p:cNvPr id="17" name="TextBox 16"/>
+          <p:cNvSpPr txBox="1"/>
+          <p:nvPr/>
+        </p:nvSpPr>
+        <p:spPr>
+          <a:xfrm>
+            <a:off x="6583680" y="3108960"/>
+            <a:ext cx="2103120" cy="566928"/>
+          </a:xfrm>
+          <a:prstGeom prst="rect">
+            <a:avLst/>
+          </a:prstGeom>
+          <a:noFill/>
+        </p:spPr>
+        <p:txBody>
+          <a:bodyPr wrap="square" anchor="ctr" lIns="0" rIns="0" tIns="0" bIns="0">
+            <a:spAutoFit/>
+          </a:bodyPr>
+          <a:lstStyle/>
+          <a:p>
+            <a:pPr algn="l"/>
+            <a:r>
+              <a:rPr sz="1300" b="0" i="0">
+                <a:solidFill>
+                  <a:srgbClr val="1F2A33"/>
+                </a:solidFill>
+                <a:latin typeface="Calibri"/>
+              </a:rPr>
+              <a:t>50 GB</a:t>
+            </a:r>
+          </a:p>
+        </p:txBody>
+      </p:sp>
+      <p:sp>
+        <p:nvSpPr>
+          <p:cNvPr id="18" name="TextBox 17"/>
+          <p:cNvSpPr txBox="1"/>
+          <p:nvPr/>
+        </p:nvSpPr>
+        <p:spPr>
+          <a:xfrm>
+            <a:off x="8961120" y="3108960"/>
+            <a:ext cx="2560320" cy="566928"/>
+          </a:xfrm>
+          <a:prstGeom prst="rect">
+            <a:avLst/>
+          </a:prstGeom>
+          <a:noFill/>
+        </p:spPr>
+        <p:txBody>
+          <a:bodyPr wrap="square" anchor="ctr" lIns="0" rIns="0" tIns="0" bIns="0">
+            <a:spAutoFit/>
+          </a:bodyPr>
+          <a:lstStyle/>
+          <a:p>
+            <a:pPr algn="l"/>
+            <a:r>
+              <a:rPr sz="1300" b="1" i="0">
+                <a:solidFill>
+                  <a:srgbClr val="0F3E4C"/>
+                </a:solidFill>
+                <a:latin typeface="Calibri"/>
+              </a:rPr>
+              <a:t>$149</a:t>
+            </a:r>
+          </a:p>
+        </p:txBody>
+      </p:sp>
+      <p:sp>
+        <p:nvSpPr>
+          <p:cNvPr id="19" name="Rounded Rectangle 18"/>
           <p:cNvSpPr/>
           <p:nvPr/>
         </p:nvSpPr>
         <p:spPr>
           <a:xfrm>
-            <a:off x="384048" y="1682496"/>
-            <a:ext cx="2715768" cy="256032"/>
-          </a:xfrm>
-          <a:prstGeom prst="rect">
-            <a:avLst/>
+            <a:off x="457200" y="3749040"/>
+            <a:ext cx="11247120" cy="566928"/>
+          </a:xfrm>
+          <a:prstGeom prst="roundRect">
+            <a:avLst>
+              <a:gd name="adj" fmla="val 5000"/>
+            </a:avLst>
           </a:prstGeom>
           <a:solidFill>
-            <a:srgbClr val="6B7280"/>
+            <a:srgbClr val="F4F8FA"/>
           </a:solidFill>
           <a:ln>
             <a:noFill/>
@@ -3738,343 +4717,165 @@
       </p:sp>
       <p:sp>
         <p:nvSpPr>
-          <p:cNvPr id="9" name="TextBox 8"/>
-          <p:cNvSpPr txBox="1"/>
-          <p:nvPr/>
-        </p:nvSpPr>
-        <p:spPr>
-          <a:xfrm>
-            <a:off x="384048" y="1426464"/>
-            <a:ext cx="2715768" cy="457200"/>
-          </a:xfrm>
-          <a:prstGeom prst="rect">
-            <a:avLst/>
-          </a:prstGeom>
-          <a:noFill/>
-        </p:spPr>
-        <p:txBody>
-          <a:bodyPr wrap="square" lIns="45720" rIns="45720" tIns="18288" bIns="18288">
-            <a:spAutoFit/>
-          </a:bodyPr>
-          <a:lstStyle/>
-          <a:p>
-            <a:pPr algn="ctr"/>
-            <a:r>
-              <a:rPr sz="1700" b="1" i="0">
-                <a:solidFill>
-                  <a:srgbClr val="FFFFFF"/>
-                </a:solidFill>
-                <a:latin typeface="Calibri"/>
-              </a:rPr>
-              <a:t>Aula</a:t>
-            </a:r>
-          </a:p>
-        </p:txBody>
-      </p:sp>
-      <p:sp>
-        <p:nvSpPr>
-          <p:cNvPr id="10" name="TextBox 9"/>
-          <p:cNvSpPr txBox="1"/>
-          <p:nvPr/>
-        </p:nvSpPr>
-        <p:spPr>
-          <a:xfrm>
-            <a:off x="384048" y="2029967"/>
-            <a:ext cx="2715768" cy="237744"/>
-          </a:xfrm>
-          <a:prstGeom prst="rect">
-            <a:avLst/>
-          </a:prstGeom>
-          <a:noFill/>
-        </p:spPr>
-        <p:txBody>
-          <a:bodyPr wrap="square" lIns="45720" rIns="45720" tIns="18288" bIns="18288">
-            <a:spAutoFit/>
-          </a:bodyPr>
-          <a:lstStyle/>
-          <a:p>
-            <a:pPr algn="ctr"/>
-            <a:r>
-              <a:rPr sz="950" b="1" i="0">
-                <a:solidFill>
-                  <a:srgbClr val="6B7280"/>
-                </a:solidFill>
-                <a:latin typeface="Calibri"/>
-              </a:rPr>
-              <a:t>GRATIS</a:t>
-            </a:r>
-          </a:p>
-        </p:txBody>
-      </p:sp>
-      <p:sp>
-        <p:nvSpPr>
-          <p:cNvPr id="11" name="TextBox 10"/>
-          <p:cNvSpPr txBox="1"/>
-          <p:nvPr/>
-        </p:nvSpPr>
-        <p:spPr>
-          <a:xfrm>
-            <a:off x="384048" y="2286000"/>
-            <a:ext cx="2715768" cy="457200"/>
-          </a:xfrm>
-          <a:prstGeom prst="rect">
-            <a:avLst/>
-          </a:prstGeom>
-          <a:noFill/>
-        </p:spPr>
-        <p:txBody>
-          <a:bodyPr wrap="square" lIns="45720" rIns="45720" tIns="18288" bIns="18288">
-            <a:spAutoFit/>
-          </a:bodyPr>
-          <a:lstStyle/>
-          <a:p>
-            <a:pPr algn="ctr"/>
-            <a:r>
-              <a:rPr sz="1800" b="1" i="0">
-                <a:solidFill>
-                  <a:srgbClr val="1F2937"/>
-                </a:solidFill>
-                <a:latin typeface="Calibri"/>
-              </a:rPr>
-              <a:t>$0</a:t>
-            </a:r>
-          </a:p>
-        </p:txBody>
-      </p:sp>
-      <p:sp>
-        <p:nvSpPr>
-          <p:cNvPr id="12" name="TextBox 11"/>
-          <p:cNvSpPr txBox="1"/>
-          <p:nvPr/>
-        </p:nvSpPr>
-        <p:spPr>
-          <a:xfrm>
-            <a:off x="429768" y="2798064"/>
-            <a:ext cx="2624328" cy="365760"/>
-          </a:xfrm>
-          <a:prstGeom prst="rect">
-            <a:avLst/>
-          </a:prstGeom>
-          <a:noFill/>
-        </p:spPr>
-        <p:txBody>
-          <a:bodyPr wrap="square" lIns="45720" rIns="45720" tIns="18288" bIns="18288">
-            <a:spAutoFit/>
-          </a:bodyPr>
-          <a:lstStyle/>
-          <a:p>
-            <a:pPr algn="ctr"/>
-            <a:r>
-              <a:rPr sz="950" b="0" i="0">
-                <a:solidFill>
-                  <a:srgbClr val="6B7280"/>
-                </a:solidFill>
-                <a:latin typeface="Calibri"/>
-              </a:rPr>
-              <a:t>Docente individual · piloto</a:t>
-            </a:r>
-          </a:p>
-        </p:txBody>
-      </p:sp>
-      <p:sp>
-        <p:nvSpPr>
-          <p:cNvPr id="13" name="TextBox 12"/>
-          <p:cNvSpPr txBox="1"/>
-          <p:nvPr/>
-        </p:nvSpPr>
-        <p:spPr>
-          <a:xfrm>
-            <a:off x="429768" y="3200400"/>
-            <a:ext cx="2624328" cy="310896"/>
-          </a:xfrm>
-          <a:prstGeom prst="rect">
-            <a:avLst/>
-          </a:prstGeom>
-          <a:noFill/>
-        </p:spPr>
-        <p:txBody>
-          <a:bodyPr wrap="square" lIns="45720" rIns="45720" tIns="18288" bIns="18288">
-            <a:spAutoFit/>
-          </a:bodyPr>
-          <a:lstStyle/>
-          <a:p>
-            <a:pPr algn="ctr"/>
-            <a:r>
-              <a:rPr sz="850" b="1" i="1">
-                <a:solidFill>
-                  <a:srgbClr val="6B7280"/>
-                </a:solidFill>
-                <a:latin typeface="Calibri"/>
-              </a:rPr>
-              <a:t>1 curso · hasta 50 estudiantes</a:t>
-            </a:r>
-          </a:p>
-        </p:txBody>
-      </p:sp>
-      <p:sp>
-        <p:nvSpPr>
-          <p:cNvPr id="14" name="TextBox 13"/>
-          <p:cNvSpPr txBox="1"/>
-          <p:nvPr/>
-        </p:nvSpPr>
-        <p:spPr>
-          <a:xfrm>
-            <a:off x="493776" y="3584448"/>
-            <a:ext cx="2532888" cy="1828800"/>
-          </a:xfrm>
-          <a:prstGeom prst="rect">
-            <a:avLst/>
-          </a:prstGeom>
-          <a:noFill/>
-        </p:spPr>
-        <p:txBody>
-          <a:bodyPr wrap="square" lIns="45720" rIns="45720" tIns="18288" bIns="18288">
-            <a:spAutoFit/>
-          </a:bodyPr>
-          <a:lstStyle/>
-          <a:p>
-            <a:pPr>
-              <a:lnSpc>
-                <a:spcPct val="100000"/>
-              </a:lnSpc>
-              <a:spcAft>
-                <a:spcPts val="500"/>
-              </a:spcAft>
-            </a:pPr>
-            <a:r>
-              <a:rPr sz="1050" b="1" i="0">
-                <a:solidFill>
-                  <a:srgbClr val="059669"/>
-                </a:solidFill>
-                <a:latin typeface="Calibri"/>
-              </a:rPr>
-              <a:t>✓ </a:t>
-            </a:r>
-            <a:r>
-              <a:rPr sz="1050" b="0" i="0">
-                <a:solidFill>
-                  <a:srgbClr val="1F2937"/>
-                </a:solidFill>
-                <a:latin typeface="Calibri"/>
-              </a:rPr>
-              <a:t>Cursos, contenidos, exámenes y talleres</a:t>
-            </a:r>
-          </a:p>
-          <a:p>
-            <a:pPr>
-              <a:lnSpc>
-                <a:spcPct val="100000"/>
-              </a:lnSpc>
-              <a:spcAft>
-                <a:spcPts val="500"/>
-              </a:spcAft>
-            </a:pPr>
-            <a:r>
-              <a:rPr sz="1050" b="1" i="0">
-                <a:solidFill>
-                  <a:srgbClr val="059669"/>
-                </a:solidFill>
-                <a:latin typeface="Calibri"/>
-              </a:rPr>
-              <a:t>✓ </a:t>
-            </a:r>
-            <a:r>
-              <a:rPr sz="1050" b="0" i="0">
-                <a:solidFill>
-                  <a:srgbClr val="1F2937"/>
-                </a:solidFill>
-                <a:latin typeface="Calibri"/>
-              </a:rPr>
-              <a:t>Calificación manual + libro de notas</a:t>
-            </a:r>
-          </a:p>
-          <a:p>
-            <a:pPr>
-              <a:lnSpc>
-                <a:spcPct val="100000"/>
-              </a:lnSpc>
-              <a:spcAft>
-                <a:spcPts val="500"/>
-              </a:spcAft>
-            </a:pPr>
-            <a:r>
-              <a:rPr sz="1050" b="1" i="0">
-                <a:solidFill>
-                  <a:srgbClr val="059669"/>
-                </a:solidFill>
-                <a:latin typeface="Calibri"/>
-              </a:rPr>
-              <a:t>✓ </a:t>
-            </a:r>
-            <a:r>
-              <a:rPr sz="1050" b="0" i="0">
-                <a:solidFill>
-                  <a:srgbClr val="1F2937"/>
-                </a:solidFill>
-                <a:latin typeface="Calibri"/>
-              </a:rPr>
-              <a:t>Asistencia, calendario, mensajería</a:t>
-            </a:r>
-          </a:p>
-        </p:txBody>
-      </p:sp>
-      <p:sp>
-        <p:nvSpPr>
-          <p:cNvPr id="15" name="TextBox 14"/>
-          <p:cNvSpPr txBox="1"/>
-          <p:nvPr/>
-        </p:nvSpPr>
-        <p:spPr>
-          <a:xfrm>
-            <a:off x="493776" y="5605272"/>
-            <a:ext cx="2496312" cy="731520"/>
-          </a:xfrm>
-          <a:prstGeom prst="rect">
-            <a:avLst/>
-          </a:prstGeom>
-          <a:noFill/>
-        </p:spPr>
-        <p:txBody>
-          <a:bodyPr wrap="square" lIns="45720" rIns="45720" tIns="18288" bIns="18288">
-            <a:spAutoFit/>
-          </a:bodyPr>
-          <a:lstStyle/>
-          <a:p>
-            <a:r>
-              <a:rPr sz="900" b="0" i="1">
-                <a:solidFill>
-                  <a:srgbClr val="6B7280"/>
-                </a:solidFill>
-                <a:latin typeface="Calibri"/>
-              </a:rPr>
-              <a:t>Sube a Esencial por: proyectos, foro, banco, videos, pizarras, encuestas en vivo</a:t>
-            </a:r>
-          </a:p>
-        </p:txBody>
-      </p:sp>
-      <p:sp>
-        <p:nvSpPr>
-          <p:cNvPr id="16" name="Rounded Rectangle 15"/>
+          <p:cNvPr id="20" name="TextBox 19"/>
+          <p:cNvSpPr txBox="1"/>
+          <p:nvPr/>
+        </p:nvSpPr>
+        <p:spPr>
+          <a:xfrm>
+            <a:off x="640080" y="3749040"/>
+            <a:ext cx="3474720" cy="566928"/>
+          </a:xfrm>
+          <a:prstGeom prst="rect">
+            <a:avLst/>
+          </a:prstGeom>
+          <a:noFill/>
+        </p:spPr>
+        <p:txBody>
+          <a:bodyPr wrap="square" anchor="ctr" lIns="0" rIns="0" tIns="0" bIns="0">
+            <a:spAutoFit/>
+          </a:bodyPr>
+          <a:lstStyle/>
+          <a:p>
+            <a:pPr algn="l"/>
+            <a:r>
+              <a:rPr sz="1300" b="1" i="0">
+                <a:solidFill>
+                  <a:srgbClr val="1F2A33"/>
+                </a:solidFill>
+                <a:latin typeface="Calibri"/>
+              </a:rPr>
+              <a:t>Mediana</a:t>
+            </a:r>
+          </a:p>
+        </p:txBody>
+      </p:sp>
+      <p:sp>
+        <p:nvSpPr>
+          <p:cNvPr id="21" name="TextBox 20"/>
+          <p:cNvSpPr txBox="1"/>
+          <p:nvPr/>
+        </p:nvSpPr>
+        <p:spPr>
+          <a:xfrm>
+            <a:off x="4297680" y="3749040"/>
+            <a:ext cx="2103120" cy="566928"/>
+          </a:xfrm>
+          <a:prstGeom prst="rect">
+            <a:avLst/>
+          </a:prstGeom>
+          <a:noFill/>
+        </p:spPr>
+        <p:txBody>
+          <a:bodyPr wrap="square" anchor="ctr" lIns="0" rIns="0" tIns="0" bIns="0">
+            <a:spAutoFit/>
+          </a:bodyPr>
+          <a:lstStyle/>
+          <a:p>
+            <a:pPr algn="l"/>
+            <a:r>
+              <a:rPr sz="1300" b="0" i="0">
+                <a:solidFill>
+                  <a:srgbClr val="1F2A33"/>
+                </a:solidFill>
+                <a:latin typeface="Calibri"/>
+              </a:rPr>
+              <a:t>≤3.000</a:t>
+            </a:r>
+          </a:p>
+        </p:txBody>
+      </p:sp>
+      <p:sp>
+        <p:nvSpPr>
+          <p:cNvPr id="22" name="TextBox 21"/>
+          <p:cNvSpPr txBox="1"/>
+          <p:nvPr/>
+        </p:nvSpPr>
+        <p:spPr>
+          <a:xfrm>
+            <a:off x="6583680" y="3749040"/>
+            <a:ext cx="2103120" cy="566928"/>
+          </a:xfrm>
+          <a:prstGeom prst="rect">
+            <a:avLst/>
+          </a:prstGeom>
+          <a:noFill/>
+        </p:spPr>
+        <p:txBody>
+          <a:bodyPr wrap="square" anchor="ctr" lIns="0" rIns="0" tIns="0" bIns="0">
+            <a:spAutoFit/>
+          </a:bodyPr>
+          <a:lstStyle/>
+          <a:p>
+            <a:pPr algn="l"/>
+            <a:r>
+              <a:rPr sz="1300" b="0" i="0">
+                <a:solidFill>
+                  <a:srgbClr val="1F2A33"/>
+                </a:solidFill>
+                <a:latin typeface="Calibri"/>
+              </a:rPr>
+              <a:t>100 GB</a:t>
+            </a:r>
+          </a:p>
+        </p:txBody>
+      </p:sp>
+      <p:sp>
+        <p:nvSpPr>
+          <p:cNvPr id="23" name="TextBox 22"/>
+          <p:cNvSpPr txBox="1"/>
+          <p:nvPr/>
+        </p:nvSpPr>
+        <p:spPr>
+          <a:xfrm>
+            <a:off x="8961120" y="3749040"/>
+            <a:ext cx="2560320" cy="566928"/>
+          </a:xfrm>
+          <a:prstGeom prst="rect">
+            <a:avLst/>
+          </a:prstGeom>
+          <a:noFill/>
+        </p:spPr>
+        <p:txBody>
+          <a:bodyPr wrap="square" anchor="ctr" lIns="0" rIns="0" tIns="0" bIns="0">
+            <a:spAutoFit/>
+          </a:bodyPr>
+          <a:lstStyle/>
+          <a:p>
+            <a:pPr algn="l"/>
+            <a:r>
+              <a:rPr sz="1300" b="1" i="0">
+                <a:solidFill>
+                  <a:srgbClr val="0F3E4C"/>
+                </a:solidFill>
+                <a:latin typeface="Calibri"/>
+              </a:rPr>
+              <a:t>$349</a:t>
+            </a:r>
+          </a:p>
+        </p:txBody>
+      </p:sp>
+      <p:sp>
+        <p:nvSpPr>
+          <p:cNvPr id="24" name="Rounded Rectangle 23"/>
           <p:cNvSpPr/>
           <p:nvPr/>
         </p:nvSpPr>
         <p:spPr>
           <a:xfrm>
-            <a:off x="3273552" y="1371600"/>
-            <a:ext cx="2715768" cy="5074920"/>
+            <a:off x="457200" y="4389120"/>
+            <a:ext cx="11247120" cy="566928"/>
           </a:xfrm>
           <a:prstGeom prst="roundRect">
             <a:avLst>
-              <a:gd name="adj" fmla="val 4000"/>
+              <a:gd name="adj" fmla="val 5000"/>
             </a:avLst>
           </a:prstGeom>
           <a:solidFill>
-            <a:srgbClr val="F9FAFB"/>
+            <a:srgbClr val="F4F8FA"/>
           </a:solidFill>
-          <a:ln w="12700">
-            <a:solidFill>
-              <a:srgbClr val="E5E7EB"/>
-            </a:solidFill>
+          <a:ln>
+            <a:noFill/>
           </a:ln>
           <a:effectLst/>
         </p:spPr>
@@ -4102,22 +4903,162 @@
       </p:sp>
       <p:sp>
         <p:nvSpPr>
-          <p:cNvPr id="17" name="Rounded Rectangle 16"/>
+          <p:cNvPr id="25" name="TextBox 24"/>
+          <p:cNvSpPr txBox="1"/>
+          <p:nvPr/>
+        </p:nvSpPr>
+        <p:spPr>
+          <a:xfrm>
+            <a:off x="640080" y="4389120"/>
+            <a:ext cx="3474720" cy="566928"/>
+          </a:xfrm>
+          <a:prstGeom prst="rect">
+            <a:avLst/>
+          </a:prstGeom>
+          <a:noFill/>
+        </p:spPr>
+        <p:txBody>
+          <a:bodyPr wrap="square" anchor="ctr" lIns="0" rIns="0" tIns="0" bIns="0">
+            <a:spAutoFit/>
+          </a:bodyPr>
+          <a:lstStyle/>
+          <a:p>
+            <a:pPr algn="l"/>
+            <a:r>
+              <a:rPr sz="1300" b="1" i="0">
+                <a:solidFill>
+                  <a:srgbClr val="1F2A33"/>
+                </a:solidFill>
+                <a:latin typeface="Calibri"/>
+              </a:rPr>
+              <a:t>Grande</a:t>
+            </a:r>
+          </a:p>
+        </p:txBody>
+      </p:sp>
+      <p:sp>
+        <p:nvSpPr>
+          <p:cNvPr id="26" name="TextBox 25"/>
+          <p:cNvSpPr txBox="1"/>
+          <p:nvPr/>
+        </p:nvSpPr>
+        <p:spPr>
+          <a:xfrm>
+            <a:off x="4297680" y="4389120"/>
+            <a:ext cx="2103120" cy="566928"/>
+          </a:xfrm>
+          <a:prstGeom prst="rect">
+            <a:avLst/>
+          </a:prstGeom>
+          <a:noFill/>
+        </p:spPr>
+        <p:txBody>
+          <a:bodyPr wrap="square" anchor="ctr" lIns="0" rIns="0" tIns="0" bIns="0">
+            <a:spAutoFit/>
+          </a:bodyPr>
+          <a:lstStyle/>
+          <a:p>
+            <a:pPr algn="l"/>
+            <a:r>
+              <a:rPr sz="1300" b="0" i="0">
+                <a:solidFill>
+                  <a:srgbClr val="1F2A33"/>
+                </a:solidFill>
+                <a:latin typeface="Calibri"/>
+              </a:rPr>
+              <a:t>≤10.000</a:t>
+            </a:r>
+          </a:p>
+        </p:txBody>
+      </p:sp>
+      <p:sp>
+        <p:nvSpPr>
+          <p:cNvPr id="27" name="TextBox 26"/>
+          <p:cNvSpPr txBox="1"/>
+          <p:nvPr/>
+        </p:nvSpPr>
+        <p:spPr>
+          <a:xfrm>
+            <a:off x="6583680" y="4389120"/>
+            <a:ext cx="2103120" cy="566928"/>
+          </a:xfrm>
+          <a:prstGeom prst="rect">
+            <a:avLst/>
+          </a:prstGeom>
+          <a:noFill/>
+        </p:spPr>
+        <p:txBody>
+          <a:bodyPr wrap="square" anchor="ctr" lIns="0" rIns="0" tIns="0" bIns="0">
+            <a:spAutoFit/>
+          </a:bodyPr>
+          <a:lstStyle/>
+          <a:p>
+            <a:pPr algn="l"/>
+            <a:r>
+              <a:rPr sz="1300" b="0" i="0">
+                <a:solidFill>
+                  <a:srgbClr val="1F2A33"/>
+                </a:solidFill>
+                <a:latin typeface="Calibri"/>
+              </a:rPr>
+              <a:t>200 GB</a:t>
+            </a:r>
+          </a:p>
+        </p:txBody>
+      </p:sp>
+      <p:sp>
+        <p:nvSpPr>
+          <p:cNvPr id="28" name="TextBox 27"/>
+          <p:cNvSpPr txBox="1"/>
+          <p:nvPr/>
+        </p:nvSpPr>
+        <p:spPr>
+          <a:xfrm>
+            <a:off x="8961120" y="4389120"/>
+            <a:ext cx="2560320" cy="566928"/>
+          </a:xfrm>
+          <a:prstGeom prst="rect">
+            <a:avLst/>
+          </a:prstGeom>
+          <a:noFill/>
+        </p:spPr>
+        <p:txBody>
+          <a:bodyPr wrap="square" anchor="ctr" lIns="0" rIns="0" tIns="0" bIns="0">
+            <a:spAutoFit/>
+          </a:bodyPr>
+          <a:lstStyle/>
+          <a:p>
+            <a:pPr algn="l"/>
+            <a:r>
+              <a:rPr sz="1300" b="1" i="0">
+                <a:solidFill>
+                  <a:srgbClr val="0F3E4C"/>
+                </a:solidFill>
+                <a:latin typeface="Calibri"/>
+              </a:rPr>
+              <a:t>$799</a:t>
+            </a:r>
+          </a:p>
+        </p:txBody>
+      </p:sp>
+      <p:sp>
+        <p:nvSpPr>
+          <p:cNvPr id="29" name="Rounded Rectangle 28"/>
           <p:cNvSpPr/>
           <p:nvPr/>
         </p:nvSpPr>
         <p:spPr>
           <a:xfrm>
-            <a:off x="3273552" y="1371600"/>
-            <a:ext cx="2715768" cy="566928"/>
+            <a:off x="457200" y="5029200"/>
+            <a:ext cx="11247120" cy="566928"/>
           </a:xfrm>
           <a:prstGeom prst="roundRect">
             <a:avLst>
-              <a:gd name="adj" fmla="val 6000"/>
+              <a:gd name="adj" fmla="val 5000"/>
             </a:avLst>
           </a:prstGeom>
           <a:solidFill>
-            <a:srgbClr val="059669"/>
+            <a:srgbClr val="F4F8FA"/>
           </a:solidFill>
           <a:ln>
             <a:noFill/>
@@ -4148,20 +5089,355 @@
       </p:sp>
       <p:sp>
         <p:nvSpPr>
-          <p:cNvPr id="18" name="Rectangle 17"/>
+          <p:cNvPr id="30" name="TextBox 29"/>
+          <p:cNvSpPr txBox="1"/>
+          <p:nvPr/>
+        </p:nvSpPr>
+        <p:spPr>
+          <a:xfrm>
+            <a:off x="640080" y="5029200"/>
+            <a:ext cx="3474720" cy="566928"/>
+          </a:xfrm>
+          <a:prstGeom prst="rect">
+            <a:avLst/>
+          </a:prstGeom>
+          <a:noFill/>
+        </p:spPr>
+        <p:txBody>
+          <a:bodyPr wrap="square" anchor="ctr" lIns="0" rIns="0" tIns="0" bIns="0">
+            <a:spAutoFit/>
+          </a:bodyPr>
+          <a:lstStyle/>
+          <a:p>
+            <a:pPr algn="l"/>
+            <a:r>
+              <a:rPr sz="1300" b="1" i="0">
+                <a:solidFill>
+                  <a:srgbClr val="1F2A33"/>
+                </a:solidFill>
+                <a:latin typeface="Calibri"/>
+              </a:rPr>
+              <a:t>Enterprise</a:t>
+            </a:r>
+          </a:p>
+        </p:txBody>
+      </p:sp>
+      <p:sp>
+        <p:nvSpPr>
+          <p:cNvPr id="31" name="TextBox 30"/>
+          <p:cNvSpPr txBox="1"/>
+          <p:nvPr/>
+        </p:nvSpPr>
+        <p:spPr>
+          <a:xfrm>
+            <a:off x="4297680" y="5029200"/>
+            <a:ext cx="2103120" cy="566928"/>
+          </a:xfrm>
+          <a:prstGeom prst="rect">
+            <a:avLst/>
+          </a:prstGeom>
+          <a:noFill/>
+        </p:spPr>
+        <p:txBody>
+          <a:bodyPr wrap="square" anchor="ctr" lIns="0" rIns="0" tIns="0" bIns="0">
+            <a:spAutoFit/>
+          </a:bodyPr>
+          <a:lstStyle/>
+          <a:p>
+            <a:pPr algn="l"/>
+            <a:r>
+              <a:rPr sz="1300" b="0" i="0">
+                <a:solidFill>
+                  <a:srgbClr val="1F2A33"/>
+                </a:solidFill>
+                <a:latin typeface="Calibri"/>
+              </a:rPr>
+              <a:t>&gt;10.000</a:t>
+            </a:r>
+          </a:p>
+        </p:txBody>
+      </p:sp>
+      <p:sp>
+        <p:nvSpPr>
+          <p:cNvPr id="32" name="TextBox 31"/>
+          <p:cNvSpPr txBox="1"/>
+          <p:nvPr/>
+        </p:nvSpPr>
+        <p:spPr>
+          <a:xfrm>
+            <a:off x="6583680" y="5029200"/>
+            <a:ext cx="2103120" cy="566928"/>
+          </a:xfrm>
+          <a:prstGeom prst="rect">
+            <a:avLst/>
+          </a:prstGeom>
+          <a:noFill/>
+        </p:spPr>
+        <p:txBody>
+          <a:bodyPr wrap="square" anchor="ctr" lIns="0" rIns="0" tIns="0" bIns="0">
+            <a:spAutoFit/>
+          </a:bodyPr>
+          <a:lstStyle/>
+          <a:p>
+            <a:pPr algn="l"/>
+            <a:r>
+              <a:rPr sz="1300" b="0" i="0">
+                <a:solidFill>
+                  <a:srgbClr val="1F2A33"/>
+                </a:solidFill>
+                <a:latin typeface="Calibri"/>
+              </a:rPr>
+              <a:t>custom</a:t>
+            </a:r>
+          </a:p>
+        </p:txBody>
+      </p:sp>
+      <p:sp>
+        <p:nvSpPr>
+          <p:cNvPr id="33" name="TextBox 32"/>
+          <p:cNvSpPr txBox="1"/>
+          <p:nvPr/>
+        </p:nvSpPr>
+        <p:spPr>
+          <a:xfrm>
+            <a:off x="8961120" y="5029200"/>
+            <a:ext cx="2560320" cy="566928"/>
+          </a:xfrm>
+          <a:prstGeom prst="rect">
+            <a:avLst/>
+          </a:prstGeom>
+          <a:noFill/>
+        </p:spPr>
+        <p:txBody>
+          <a:bodyPr wrap="square" anchor="ctr" lIns="0" rIns="0" tIns="0" bIns="0">
+            <a:spAutoFit/>
+          </a:bodyPr>
+          <a:lstStyle/>
+          <a:p>
+            <a:pPr algn="l"/>
+            <a:r>
+              <a:rPr sz="1300" b="1" i="0">
+                <a:solidFill>
+                  <a:srgbClr val="0F3E4C"/>
+                </a:solidFill>
+                <a:latin typeface="Calibri"/>
+              </a:rPr>
+              <a:t>desde $1.499</a:t>
+            </a:r>
+          </a:p>
+        </p:txBody>
+      </p:sp>
+      <p:sp>
+        <p:nvSpPr>
+          <p:cNvPr id="34" name="TextBox 33"/>
+          <p:cNvSpPr txBox="1"/>
+          <p:nvPr/>
+        </p:nvSpPr>
+        <p:spPr>
+          <a:xfrm>
+            <a:off x="457200" y="5943600"/>
+            <a:ext cx="11247120" cy="457200"/>
+          </a:xfrm>
+          <a:prstGeom prst="rect">
+            <a:avLst/>
+          </a:prstGeom>
+          <a:noFill/>
+        </p:spPr>
+        <p:txBody>
+          <a:bodyPr wrap="square" anchor="t" lIns="0" rIns="0" tIns="0" bIns="0">
+            <a:spAutoFit/>
+          </a:bodyPr>
+          <a:lstStyle/>
+          <a:p>
+            <a:pPr algn="ctr"/>
+            <a:r>
+              <a:rPr sz="1200" b="0" i="1">
+                <a:solidFill>
+                  <a:srgbClr val="0F3E4C"/>
+                </a:solidFill>
+                <a:latin typeface="Calibri"/>
+              </a:rPr>
+              <a:t>Modalidad Administrada (+$300/mes): ExamLab opera tu tenant. Disponible desde Pequeña.</a:t>
+            </a:r>
+          </a:p>
+        </p:txBody>
+      </p:sp>
+      <p:sp>
+        <p:nvSpPr>
+          <p:cNvPr id="35" name="TextBox 34"/>
+          <p:cNvSpPr txBox="1"/>
+          <p:nvPr/>
+        </p:nvSpPr>
+        <p:spPr>
+          <a:xfrm>
+            <a:off x="457200" y="6492240"/>
+            <a:ext cx="7315200" cy="274320"/>
+          </a:xfrm>
+          <a:prstGeom prst="rect">
+            <a:avLst/>
+          </a:prstGeom>
+          <a:noFill/>
+        </p:spPr>
+        <p:txBody>
+          <a:bodyPr wrap="square" anchor="t" lIns="0" rIns="0" tIns="0" bIns="0">
+            <a:spAutoFit/>
+          </a:bodyPr>
+          <a:lstStyle/>
+          <a:p>
+            <a:pPr algn="l"/>
+            <a:r>
+              <a:rPr sz="900" b="0" i="0">
+                <a:solidFill>
+                  <a:srgbClr val="647480"/>
+                </a:solidFill>
+                <a:latin typeface="Calibri"/>
+              </a:rPr>
+              <a:t>ExamLab · Modelo modular — planes + add-ons</a:t>
+            </a:r>
+          </a:p>
+        </p:txBody>
+      </p:sp>
+      <p:sp>
+        <p:nvSpPr>
+          <p:cNvPr id="36" name="TextBox 35"/>
+          <p:cNvSpPr txBox="1"/>
+          <p:nvPr/>
+        </p:nvSpPr>
+        <p:spPr>
+          <a:xfrm>
+            <a:off x="11430000" y="6492240"/>
+            <a:ext cx="457200" cy="274320"/>
+          </a:xfrm>
+          <a:prstGeom prst="rect">
+            <a:avLst/>
+          </a:prstGeom>
+          <a:noFill/>
+        </p:spPr>
+        <p:txBody>
+          <a:bodyPr wrap="square" anchor="t" lIns="0" rIns="0" tIns="0" bIns="0">
+            <a:spAutoFit/>
+          </a:bodyPr>
+          <a:lstStyle/>
+          <a:p>
+            <a:pPr algn="r"/>
+            <a:r>
+              <a:rPr sz="900" b="0" i="0">
+                <a:solidFill>
+                  <a:srgbClr val="647480"/>
+                </a:solidFill>
+                <a:latin typeface="Calibri"/>
+              </a:rPr>
+              <a:t>3</a:t>
+            </a:r>
+          </a:p>
+        </p:txBody>
+      </p:sp>
+    </p:spTree>
+  </p:cSld>
+  <p:clrMapOvr>
+    <a:masterClrMapping/>
+  </p:clrMapOvr>
+</p:sld>
+</file>
+
+<file path=ppt/slides/slide4.xml><?xml version="1.0" encoding="utf-8"?>
+<p:sld xmlns:a="http://schemas.openxmlformats.org/drawingml/2006/main" xmlns:p="http://schemas.openxmlformats.org/presentationml/2006/main" xmlns:r="http://schemas.openxmlformats.org/officeDocument/2006/relationships">
+  <p:cSld>
+    <p:spTree>
+      <p:nvGrpSpPr>
+        <p:cNvPr id="1" name=""/>
+        <p:cNvGrpSpPr/>
+        <p:nvPr/>
+      </p:nvGrpSpPr>
+      <p:grpSpPr/>
+      <p:sp>
+        <p:nvSpPr>
+          <p:cNvPr id="2" name="TextBox 1"/>
+          <p:cNvSpPr txBox="1"/>
+          <p:nvPr/>
+        </p:nvSpPr>
+        <p:spPr>
+          <a:xfrm>
+            <a:off x="457200" y="365760"/>
+            <a:ext cx="10972800" cy="365760"/>
+          </a:xfrm>
+          <a:prstGeom prst="rect">
+            <a:avLst/>
+          </a:prstGeom>
+          <a:noFill/>
+        </p:spPr>
+        <p:txBody>
+          <a:bodyPr wrap="square" anchor="t" lIns="0" rIns="0" tIns="0" bIns="0">
+            <a:spAutoFit/>
+          </a:bodyPr>
+          <a:lstStyle/>
+          <a:p>
+            <a:pPr algn="l"/>
+            <a:r>
+              <a:rPr sz="1200" b="1" i="0">
+                <a:solidFill>
+                  <a:srgbClr val="2EB8C7"/>
+                </a:solidFill>
+                <a:latin typeface="Calibri"/>
+              </a:rPr>
+              <a:t>COMBOS QUE TIENEN SENTIDO</a:t>
+            </a:r>
+          </a:p>
+        </p:txBody>
+      </p:sp>
+      <p:sp>
+        <p:nvSpPr>
+          <p:cNvPr id="3" name="TextBox 2"/>
+          <p:cNvSpPr txBox="1"/>
+          <p:nvPr/>
+        </p:nvSpPr>
+        <p:spPr>
+          <a:xfrm>
+            <a:off x="457200" y="713232"/>
+            <a:ext cx="11247120" cy="731520"/>
+          </a:xfrm>
+          <a:prstGeom prst="rect">
+            <a:avLst/>
+          </a:prstGeom>
+          <a:noFill/>
+        </p:spPr>
+        <p:txBody>
+          <a:bodyPr wrap="square" anchor="t" lIns="0" rIns="0" tIns="0" bIns="0">
+            <a:spAutoFit/>
+          </a:bodyPr>
+          <a:lstStyle/>
+          <a:p>
+            <a:pPr algn="l"/>
+            <a:r>
+              <a:rPr sz="3000" b="1" i="0">
+                <a:solidFill>
+                  <a:srgbClr val="0F3E4C"/>
+                </a:solidFill>
+                <a:latin typeface="Calibri"/>
+              </a:rPr>
+              <a:t>Bundles recomendados por perfil de institución</a:t>
+            </a:r>
+          </a:p>
+        </p:txBody>
+      </p:sp>
+      <p:sp>
+        <p:nvSpPr>
+          <p:cNvPr id="4" name="Rounded Rectangle 3"/>
           <p:cNvSpPr/>
           <p:nvPr/>
         </p:nvSpPr>
         <p:spPr>
           <a:xfrm>
-            <a:off x="3273552" y="1682496"/>
-            <a:ext cx="2715768" cy="256032"/>
-          </a:xfrm>
-          <a:prstGeom prst="rect">
-            <a:avLst/>
+            <a:off x="457200" y="1783080"/>
+            <a:ext cx="11247120" cy="786384"/>
+          </a:xfrm>
+          <a:prstGeom prst="roundRect">
+            <a:avLst>
+              <a:gd name="adj" fmla="val 5000"/>
+            </a:avLst>
           </a:prstGeom>
           <a:solidFill>
-            <a:srgbClr val="059669"/>
+            <a:srgbClr val="F4F8FA"/>
           </a:solidFill>
           <a:ln>
             <a:noFill/>
@@ -4192,308 +5468,165 @@
       </p:sp>
       <p:sp>
         <p:nvSpPr>
-          <p:cNvPr id="19" name="TextBox 18"/>
-          <p:cNvSpPr txBox="1"/>
-          <p:nvPr/>
-        </p:nvSpPr>
-        <p:spPr>
-          <a:xfrm>
-            <a:off x="3273552" y="1426464"/>
-            <a:ext cx="2715768" cy="457200"/>
-          </a:xfrm>
-          <a:prstGeom prst="rect">
-            <a:avLst/>
-          </a:prstGeom>
-          <a:noFill/>
-        </p:spPr>
-        <p:txBody>
-          <a:bodyPr wrap="square" lIns="45720" rIns="45720" tIns="18288" bIns="18288">
-            <a:spAutoFit/>
-          </a:bodyPr>
-          <a:lstStyle/>
-          <a:p>
-            <a:pPr algn="ctr"/>
-            <a:r>
-              <a:rPr sz="1700" b="1" i="0">
-                <a:solidFill>
-                  <a:srgbClr val="FFFFFF"/>
-                </a:solidFill>
-                <a:latin typeface="Calibri"/>
-              </a:rPr>
-              <a:t>Esencial</a:t>
-            </a:r>
-          </a:p>
-        </p:txBody>
-      </p:sp>
-      <p:sp>
-        <p:nvSpPr>
-          <p:cNvPr id="20" name="TextBox 19"/>
-          <p:cNvSpPr txBox="1"/>
-          <p:nvPr/>
-        </p:nvSpPr>
-        <p:spPr>
-          <a:xfrm>
-            <a:off x="3273552" y="2286000"/>
-            <a:ext cx="2715768" cy="457200"/>
-          </a:xfrm>
-          <a:prstGeom prst="rect">
-            <a:avLst/>
-          </a:prstGeom>
-          <a:noFill/>
-        </p:spPr>
-        <p:txBody>
-          <a:bodyPr wrap="square" lIns="45720" rIns="45720" tIns="18288" bIns="18288">
-            <a:spAutoFit/>
-          </a:bodyPr>
-          <a:lstStyle/>
-          <a:p>
-            <a:pPr algn="ctr"/>
-            <a:r>
-              <a:rPr sz="1800" b="1" i="0">
-                <a:solidFill>
-                  <a:srgbClr val="1F2937"/>
-                </a:solidFill>
-                <a:latin typeface="Calibri"/>
-              </a:rPr>
-              <a:t>~$79/mes</a:t>
-            </a:r>
-          </a:p>
-        </p:txBody>
-      </p:sp>
-      <p:sp>
-        <p:nvSpPr>
-          <p:cNvPr id="21" name="TextBox 20"/>
-          <p:cNvSpPr txBox="1"/>
-          <p:nvPr/>
-        </p:nvSpPr>
-        <p:spPr>
-          <a:xfrm>
-            <a:off x="3319272" y="2798064"/>
-            <a:ext cx="2624328" cy="365760"/>
-          </a:xfrm>
-          <a:prstGeom prst="rect">
-            <a:avLst/>
-          </a:prstGeom>
-          <a:noFill/>
-        </p:spPr>
-        <p:txBody>
-          <a:bodyPr wrap="square" lIns="45720" rIns="45720" tIns="18288" bIns="18288">
-            <a:spAutoFit/>
-          </a:bodyPr>
-          <a:lstStyle/>
-          <a:p>
-            <a:pPr algn="ctr"/>
-            <a:r>
-              <a:rPr sz="950" b="0" i="0">
-                <a:solidFill>
-                  <a:srgbClr val="6B7280"/>
-                </a:solidFill>
-                <a:latin typeface="Calibri"/>
-              </a:rPr>
-              <a:t>Colegio pequeño · hasta 250 est.</a:t>
-            </a:r>
-          </a:p>
-        </p:txBody>
-      </p:sp>
-      <p:sp>
-        <p:nvSpPr>
-          <p:cNvPr id="22" name="TextBox 21"/>
-          <p:cNvSpPr txBox="1"/>
-          <p:nvPr/>
-        </p:nvSpPr>
-        <p:spPr>
-          <a:xfrm>
-            <a:off x="3319272" y="3200400"/>
-            <a:ext cx="2624328" cy="310896"/>
-          </a:xfrm>
-          <a:prstGeom prst="rect">
-            <a:avLst/>
-          </a:prstGeom>
-          <a:noFill/>
-        </p:spPr>
-        <p:txBody>
-          <a:bodyPr wrap="square" lIns="45720" rIns="45720" tIns="18288" bIns="18288">
-            <a:spAutoFit/>
-          </a:bodyPr>
-          <a:lstStyle/>
-          <a:p>
-            <a:pPr algn="ctr"/>
-            <a:r>
-              <a:rPr sz="850" b="1" i="1">
-                <a:solidFill>
-                  <a:srgbClr val="059669"/>
-                </a:solidFill>
-                <a:latin typeface="Calibri"/>
-              </a:rPr>
-              <a:t>Evaluación digital completa (manual)</a:t>
-            </a:r>
-          </a:p>
-        </p:txBody>
-      </p:sp>
-      <p:sp>
-        <p:nvSpPr>
-          <p:cNvPr id="23" name="TextBox 22"/>
-          <p:cNvSpPr txBox="1"/>
-          <p:nvPr/>
-        </p:nvSpPr>
-        <p:spPr>
-          <a:xfrm>
-            <a:off x="3383280" y="3584448"/>
-            <a:ext cx="2532888" cy="1828800"/>
-          </a:xfrm>
-          <a:prstGeom prst="rect">
-            <a:avLst/>
-          </a:prstGeom>
-          <a:noFill/>
-        </p:spPr>
-        <p:txBody>
-          <a:bodyPr wrap="square" lIns="45720" rIns="45720" tIns="18288" bIns="18288">
-            <a:spAutoFit/>
-          </a:bodyPr>
-          <a:lstStyle/>
-          <a:p>
-            <a:pPr>
-              <a:lnSpc>
-                <a:spcPct val="100000"/>
-              </a:lnSpc>
-              <a:spcAft>
-                <a:spcPts val="500"/>
-              </a:spcAft>
-            </a:pPr>
-            <a:r>
-              <a:rPr sz="1050" b="1" i="0">
-                <a:solidFill>
-                  <a:srgbClr val="059669"/>
-                </a:solidFill>
-                <a:latin typeface="Calibri"/>
-              </a:rPr>
-              <a:t>✓ </a:t>
-            </a:r>
-            <a:r>
-              <a:rPr sz="1050" b="0" i="0">
-                <a:solidFill>
-                  <a:srgbClr val="1F2937"/>
-                </a:solidFill>
-                <a:latin typeface="Calibri"/>
-              </a:rPr>
-              <a:t>Todo Aula, sin límite de cursos</a:t>
-            </a:r>
-          </a:p>
-          <a:p>
-            <a:pPr>
-              <a:lnSpc>
-                <a:spcPct val="100000"/>
-              </a:lnSpc>
-              <a:spcAft>
-                <a:spcPts val="500"/>
-              </a:spcAft>
-            </a:pPr>
-            <a:r>
-              <a:rPr sz="1050" b="1" i="0">
-                <a:solidFill>
-                  <a:srgbClr val="059669"/>
-                </a:solidFill>
-                <a:latin typeface="Calibri"/>
-              </a:rPr>
-              <a:t>✓ </a:t>
-            </a:r>
-            <a:r>
-              <a:rPr sz="1050" b="0" i="0">
-                <a:solidFill>
-                  <a:srgbClr val="1F2937"/>
-                </a:solidFill>
-                <a:latin typeface="Calibri"/>
-              </a:rPr>
-              <a:t>+ Proyectos, foro, banco de preguntas</a:t>
-            </a:r>
-          </a:p>
-          <a:p>
-            <a:pPr>
-              <a:lnSpc>
-                <a:spcPct val="100000"/>
-              </a:lnSpc>
-              <a:spcAft>
-                <a:spcPts val="500"/>
-              </a:spcAft>
-            </a:pPr>
-            <a:r>
-              <a:rPr sz="1050" b="1" i="0">
-                <a:solidFill>
-                  <a:srgbClr val="059669"/>
-                </a:solidFill>
-                <a:latin typeface="Calibri"/>
-              </a:rPr>
-              <a:t>✓ </a:t>
-            </a:r>
-            <a:r>
-              <a:rPr sz="1050" b="0" i="0">
-                <a:solidFill>
-                  <a:srgbClr val="1F2937"/>
-                </a:solidFill>
-                <a:latin typeface="Calibri"/>
-              </a:rPr>
-              <a:t>+ Videos, pizarras y retos/encuestas en vivo</a:t>
-            </a:r>
-          </a:p>
-        </p:txBody>
-      </p:sp>
-      <p:sp>
-        <p:nvSpPr>
-          <p:cNvPr id="24" name="TextBox 23"/>
-          <p:cNvSpPr txBox="1"/>
-          <p:nvPr/>
-        </p:nvSpPr>
-        <p:spPr>
-          <a:xfrm>
-            <a:off x="3383280" y="5605272"/>
-            <a:ext cx="2496312" cy="731520"/>
-          </a:xfrm>
-          <a:prstGeom prst="rect">
-            <a:avLst/>
-          </a:prstGeom>
-          <a:noFill/>
-        </p:spPr>
-        <p:txBody>
-          <a:bodyPr wrap="square" lIns="45720" rIns="45720" tIns="18288" bIns="18288">
-            <a:spAutoFit/>
-          </a:bodyPr>
-          <a:lstStyle/>
-          <a:p>
-            <a:r>
-              <a:rPr sz="900" b="0" i="1">
-                <a:solidFill>
-                  <a:srgbClr val="6B7280"/>
-                </a:solidFill>
-                <a:latin typeface="Calibri"/>
-              </a:rPr>
-              <a:t>Sube a Profesional por: IA que genera y califica + Tutor IA</a:t>
-            </a:r>
-          </a:p>
-        </p:txBody>
-      </p:sp>
-      <p:sp>
-        <p:nvSpPr>
-          <p:cNvPr id="25" name="Rounded Rectangle 24"/>
+          <p:cNvPr id="5" name="TextBox 4"/>
+          <p:cNvSpPr txBox="1"/>
+          <p:nvPr/>
+        </p:nvSpPr>
+        <p:spPr>
+          <a:xfrm>
+            <a:off x="685800" y="1865376"/>
+            <a:ext cx="3017520" cy="365760"/>
+          </a:xfrm>
+          <a:prstGeom prst="rect">
+            <a:avLst/>
+          </a:prstGeom>
+          <a:noFill/>
+        </p:spPr>
+        <p:txBody>
+          <a:bodyPr wrap="square" anchor="t" lIns="0" rIns="0" tIns="0" bIns="0">
+            <a:spAutoFit/>
+          </a:bodyPr>
+          <a:lstStyle/>
+          <a:p>
+            <a:pPr algn="l"/>
+            <a:r>
+              <a:rPr sz="1400" b="1" i="0">
+                <a:solidFill>
+                  <a:srgbClr val="0F3E4C"/>
+                </a:solidFill>
+                <a:latin typeface="Calibri"/>
+              </a:rPr>
+              <a:t>Colegio pequeño</a:t>
+            </a:r>
+          </a:p>
+        </p:txBody>
+      </p:sp>
+      <p:sp>
+        <p:nvSpPr>
+          <p:cNvPr id="6" name="TextBox 5"/>
+          <p:cNvSpPr txBox="1"/>
+          <p:nvPr/>
+        </p:nvSpPr>
+        <p:spPr>
+          <a:xfrm>
+            <a:off x="685800" y="2203704"/>
+            <a:ext cx="3017520" cy="320040"/>
+          </a:xfrm>
+          <a:prstGeom prst="rect">
+            <a:avLst/>
+          </a:prstGeom>
+          <a:noFill/>
+        </p:spPr>
+        <p:txBody>
+          <a:bodyPr wrap="square" anchor="t" lIns="0" rIns="0" tIns="0" bIns="0">
+            <a:spAutoFit/>
+          </a:bodyPr>
+          <a:lstStyle/>
+          <a:p>
+            <a:pPr algn="l"/>
+            <a:r>
+              <a:rPr sz="1100" b="0" i="0">
+                <a:solidFill>
+                  <a:srgbClr val="647480"/>
+                </a:solidFill>
+                <a:latin typeface="Calibri"/>
+              </a:rPr>
+              <a:t>Pequeña</a:t>
+            </a:r>
+          </a:p>
+        </p:txBody>
+      </p:sp>
+      <p:sp>
+        <p:nvSpPr>
+          <p:cNvPr id="7" name="TextBox 6"/>
+          <p:cNvSpPr txBox="1"/>
+          <p:nvPr/>
+        </p:nvSpPr>
+        <p:spPr>
+          <a:xfrm>
+            <a:off x="3840480" y="2002536"/>
+            <a:ext cx="1828800" cy="365760"/>
+          </a:xfrm>
+          <a:prstGeom prst="rect">
+            <a:avLst/>
+          </a:prstGeom>
+          <a:noFill/>
+        </p:spPr>
+        <p:txBody>
+          <a:bodyPr wrap="square" anchor="ctr" lIns="0" rIns="0" tIns="0" bIns="0">
+            <a:spAutoFit/>
+          </a:bodyPr>
+          <a:lstStyle/>
+          <a:p>
+            <a:pPr algn="l"/>
+            <a:r>
+              <a:rPr sz="1500" b="1" i="0">
+                <a:solidFill>
+                  <a:srgbClr val="1E5BAF"/>
+                </a:solidFill>
+                <a:latin typeface="Calibri"/>
+              </a:rPr>
+              <a:t>$149/mes</a:t>
+            </a:r>
+          </a:p>
+        </p:txBody>
+      </p:sp>
+      <p:sp>
+        <p:nvSpPr>
+          <p:cNvPr id="8" name="TextBox 7"/>
+          <p:cNvSpPr txBox="1"/>
+          <p:nvPr/>
+        </p:nvSpPr>
+        <p:spPr>
+          <a:xfrm>
+            <a:off x="5852160" y="1901952"/>
+            <a:ext cx="5669280" cy="566928"/>
+          </a:xfrm>
+          <a:prstGeom prst="rect">
+            <a:avLst/>
+          </a:prstGeom>
+          <a:noFill/>
+        </p:spPr>
+        <p:txBody>
+          <a:bodyPr wrap="square" anchor="ctr" lIns="0" rIns="0" tIns="0" bIns="0">
+            <a:spAutoFit/>
+          </a:bodyPr>
+          <a:lstStyle/>
+          <a:p>
+            <a:pPr algn="l"/>
+            <a:r>
+              <a:rPr sz="1100" b="0" i="0">
+                <a:solidFill>
+                  <a:srgbClr val="1F2A33"/>
+                </a:solidFill>
+                <a:latin typeface="Calibri"/>
+              </a:rPr>
+              <a:t>Sin code runner, sin aislamiento, sin SSO — el plan solo. IA con clave propia.</a:t>
+            </a:r>
+          </a:p>
+        </p:txBody>
+      </p:sp>
+      <p:sp>
+        <p:nvSpPr>
+          <p:cNvPr id="9" name="Rounded Rectangle 8"/>
           <p:cNvSpPr/>
           <p:nvPr/>
         </p:nvSpPr>
         <p:spPr>
           <a:xfrm>
-            <a:off x="6163056" y="1371600"/>
-            <a:ext cx="2715768" cy="5074920"/>
+            <a:off x="457200" y="2651760"/>
+            <a:ext cx="11247120" cy="786384"/>
           </a:xfrm>
           <a:prstGeom prst="roundRect">
             <a:avLst>
-              <a:gd name="adj" fmla="val 4000"/>
+              <a:gd name="adj" fmla="val 5000"/>
             </a:avLst>
           </a:prstGeom>
           <a:solidFill>
-            <a:srgbClr val="F9FAFB"/>
+            <a:srgbClr val="F4F8FA"/>
           </a:solidFill>
-          <a:ln w="31750">
-            <a:solidFill>
-              <a:srgbClr val="7C3AED"/>
-            </a:solidFill>
+          <a:ln>
+            <a:noFill/>
           </a:ln>
           <a:effectLst/>
         </p:spPr>
@@ -4521,22 +5654,162 @@
       </p:sp>
       <p:sp>
         <p:nvSpPr>
-          <p:cNvPr id="26" name="Rounded Rectangle 25"/>
+          <p:cNvPr id="10" name="TextBox 9"/>
+          <p:cNvSpPr txBox="1"/>
+          <p:nvPr/>
+        </p:nvSpPr>
+        <p:spPr>
+          <a:xfrm>
+            <a:off x="685800" y="2734056"/>
+            <a:ext cx="3017520" cy="365760"/>
+          </a:xfrm>
+          <a:prstGeom prst="rect">
+            <a:avLst/>
+          </a:prstGeom>
+          <a:noFill/>
+        </p:spPr>
+        <p:txBody>
+          <a:bodyPr wrap="square" anchor="t" lIns="0" rIns="0" tIns="0" bIns="0">
+            <a:spAutoFit/>
+          </a:bodyPr>
+          <a:lstStyle/>
+          <a:p>
+            <a:pPr algn="l"/>
+            <a:r>
+              <a:rPr sz="1400" b="1" i="0">
+                <a:solidFill>
+                  <a:srgbClr val="0F3E4C"/>
+                </a:solidFill>
+                <a:latin typeface="Calibri"/>
+              </a:rPr>
+              <a:t>Facultad de Ingeniería</a:t>
+            </a:r>
+          </a:p>
+        </p:txBody>
+      </p:sp>
+      <p:sp>
+        <p:nvSpPr>
+          <p:cNvPr id="11" name="TextBox 10"/>
+          <p:cNvSpPr txBox="1"/>
+          <p:nvPr/>
+        </p:nvSpPr>
+        <p:spPr>
+          <a:xfrm>
+            <a:off x="685800" y="3072384"/>
+            <a:ext cx="3017520" cy="320040"/>
+          </a:xfrm>
+          <a:prstGeom prst="rect">
+            <a:avLst/>
+          </a:prstGeom>
+          <a:noFill/>
+        </p:spPr>
+        <p:txBody>
+          <a:bodyPr wrap="square" anchor="t" lIns="0" rIns="0" tIns="0" bIns="0">
+            <a:spAutoFit/>
+          </a:bodyPr>
+          <a:lstStyle/>
+          <a:p>
+            <a:pPr algn="l"/>
+            <a:r>
+              <a:rPr sz="1100" b="0" i="0">
+                <a:solidFill>
+                  <a:srgbClr val="647480"/>
+                </a:solidFill>
+                <a:latin typeface="Calibri"/>
+              </a:rPr>
+              <a:t>Mediana + Code runner</a:t>
+            </a:r>
+          </a:p>
+        </p:txBody>
+      </p:sp>
+      <p:sp>
+        <p:nvSpPr>
+          <p:cNvPr id="12" name="TextBox 11"/>
+          <p:cNvSpPr txBox="1"/>
+          <p:nvPr/>
+        </p:nvSpPr>
+        <p:spPr>
+          <a:xfrm>
+            <a:off x="3840480" y="2871216"/>
+            <a:ext cx="1828800" cy="365760"/>
+          </a:xfrm>
+          <a:prstGeom prst="rect">
+            <a:avLst/>
+          </a:prstGeom>
+          <a:noFill/>
+        </p:spPr>
+        <p:txBody>
+          <a:bodyPr wrap="square" anchor="ctr" lIns="0" rIns="0" tIns="0" bIns="0">
+            <a:spAutoFit/>
+          </a:bodyPr>
+          <a:lstStyle/>
+          <a:p>
+            <a:pPr algn="l"/>
+            <a:r>
+              <a:rPr sz="1500" b="1" i="0">
+                <a:solidFill>
+                  <a:srgbClr val="1E5BAF"/>
+                </a:solidFill>
+                <a:latin typeface="Calibri"/>
+              </a:rPr>
+              <a:t>$398/mes</a:t>
+            </a:r>
+          </a:p>
+        </p:txBody>
+      </p:sp>
+      <p:sp>
+        <p:nvSpPr>
+          <p:cNvPr id="13" name="TextBox 12"/>
+          <p:cNvSpPr txBox="1"/>
+          <p:nvPr/>
+        </p:nvSpPr>
+        <p:spPr>
+          <a:xfrm>
+            <a:off x="5852160" y="2770632"/>
+            <a:ext cx="5669280" cy="566928"/>
+          </a:xfrm>
+          <a:prstGeom prst="rect">
+            <a:avLst/>
+          </a:prstGeom>
+          <a:noFill/>
+        </p:spPr>
+        <p:txBody>
+          <a:bodyPr wrap="square" anchor="ctr" lIns="0" rIns="0" tIns="0" bIns="0">
+            <a:spAutoFit/>
+          </a:bodyPr>
+          <a:lstStyle/>
+          <a:p>
+            <a:pPr algn="l"/>
+            <a:r>
+              <a:rPr sz="1100" b="0" i="0">
+                <a:solidFill>
+                  <a:srgbClr val="1F2A33"/>
+                </a:solidFill>
+                <a:latin typeface="Calibri"/>
+              </a:rPr>
+              <a:t>Exámenes de programación Java/Python. SSO opcional si hay directorio.</a:t>
+            </a:r>
+          </a:p>
+        </p:txBody>
+      </p:sp>
+      <p:sp>
+        <p:nvSpPr>
+          <p:cNvPr id="14" name="Rounded Rectangle 13"/>
           <p:cNvSpPr/>
           <p:nvPr/>
         </p:nvSpPr>
         <p:spPr>
           <a:xfrm>
-            <a:off x="6163056" y="1371600"/>
-            <a:ext cx="2715768" cy="566928"/>
+            <a:off x="457200" y="3520440"/>
+            <a:ext cx="11247120" cy="786384"/>
           </a:xfrm>
           <a:prstGeom prst="roundRect">
             <a:avLst>
-              <a:gd name="adj" fmla="val 6000"/>
+              <a:gd name="adj" fmla="val 5000"/>
             </a:avLst>
           </a:prstGeom>
           <a:solidFill>
-            <a:srgbClr val="7C3AED"/>
+            <a:srgbClr val="F4F8FA"/>
           </a:solidFill>
           <a:ln>
             <a:noFill/>
@@ -4567,20 +5840,162 @@
       </p:sp>
       <p:sp>
         <p:nvSpPr>
-          <p:cNvPr id="27" name="Rectangle 26"/>
+          <p:cNvPr id="15" name="TextBox 14"/>
+          <p:cNvSpPr txBox="1"/>
+          <p:nvPr/>
+        </p:nvSpPr>
+        <p:spPr>
+          <a:xfrm>
+            <a:off x="685800" y="3602736"/>
+            <a:ext cx="3017520" cy="365760"/>
+          </a:xfrm>
+          <a:prstGeom prst="rect">
+            <a:avLst/>
+          </a:prstGeom>
+          <a:noFill/>
+        </p:spPr>
+        <p:txBody>
+          <a:bodyPr wrap="square" anchor="t" lIns="0" rIns="0" tIns="0" bIns="0">
+            <a:spAutoFit/>
+          </a:bodyPr>
+          <a:lstStyle/>
+          <a:p>
+            <a:pPr algn="l"/>
+            <a:r>
+              <a:rPr sz="1400" b="1" i="0">
+                <a:solidFill>
+                  <a:srgbClr val="0F3E4C"/>
+                </a:solidFill>
+                <a:latin typeface="Calibri"/>
+              </a:rPr>
+              <a:t>Universidad regulada</a:t>
+            </a:r>
+          </a:p>
+        </p:txBody>
+      </p:sp>
+      <p:sp>
+        <p:nvSpPr>
+          <p:cNvPr id="16" name="TextBox 15"/>
+          <p:cNvSpPr txBox="1"/>
+          <p:nvPr/>
+        </p:nvSpPr>
+        <p:spPr>
+          <a:xfrm>
+            <a:off x="685800" y="3941064"/>
+            <a:ext cx="3017520" cy="320040"/>
+          </a:xfrm>
+          <a:prstGeom prst="rect">
+            <a:avLst/>
+          </a:prstGeom>
+          <a:noFill/>
+        </p:spPr>
+        <p:txBody>
+          <a:bodyPr wrap="square" anchor="t" lIns="0" rIns="0" tIns="0" bIns="0">
+            <a:spAutoFit/>
+          </a:bodyPr>
+          <a:lstStyle/>
+          <a:p>
+            <a:pPr algn="l"/>
+            <a:r>
+              <a:rPr sz="1100" b="0" i="0">
+                <a:solidFill>
+                  <a:srgbClr val="647480"/>
+                </a:solidFill>
+                <a:latin typeface="Calibri"/>
+              </a:rPr>
+              <a:t>Grande + Aislamiento</a:t>
+            </a:r>
+          </a:p>
+        </p:txBody>
+      </p:sp>
+      <p:sp>
+        <p:nvSpPr>
+          <p:cNvPr id="17" name="TextBox 16"/>
+          <p:cNvSpPr txBox="1"/>
+          <p:nvPr/>
+        </p:nvSpPr>
+        <p:spPr>
+          <a:xfrm>
+            <a:off x="3840480" y="3739896"/>
+            <a:ext cx="1828800" cy="365760"/>
+          </a:xfrm>
+          <a:prstGeom prst="rect">
+            <a:avLst/>
+          </a:prstGeom>
+          <a:noFill/>
+        </p:spPr>
+        <p:txBody>
+          <a:bodyPr wrap="square" anchor="ctr" lIns="0" rIns="0" tIns="0" bIns="0">
+            <a:spAutoFit/>
+          </a:bodyPr>
+          <a:lstStyle/>
+          <a:p>
+            <a:pPr algn="l"/>
+            <a:r>
+              <a:rPr sz="1500" b="1" i="0">
+                <a:solidFill>
+                  <a:srgbClr val="1E5BAF"/>
+                </a:solidFill>
+                <a:latin typeface="Calibri"/>
+              </a:rPr>
+              <a:t>≈$852/mes</a:t>
+            </a:r>
+          </a:p>
+        </p:txBody>
+      </p:sp>
+      <p:sp>
+        <p:nvSpPr>
+          <p:cNvPr id="18" name="TextBox 17"/>
+          <p:cNvSpPr txBox="1"/>
+          <p:nvPr/>
+        </p:nvSpPr>
+        <p:spPr>
+          <a:xfrm>
+            <a:off x="5852160" y="3639312"/>
+            <a:ext cx="5669280" cy="566928"/>
+          </a:xfrm>
+          <a:prstGeom prst="rect">
+            <a:avLst/>
+          </a:prstGeom>
+          <a:noFill/>
+        </p:spPr>
+        <p:txBody>
+          <a:bodyPr wrap="square" anchor="ctr" lIns="0" rIns="0" tIns="0" bIns="0">
+            <a:spAutoFit/>
+          </a:bodyPr>
+          <a:lstStyle/>
+          <a:p>
+            <a:pPr algn="l"/>
+            <a:r>
+              <a:rPr sz="1100" b="0" i="0">
+                <a:solidFill>
+                  <a:srgbClr val="1F2A33"/>
+                </a:solidFill>
+                <a:latin typeface="Calibri"/>
+              </a:rPr>
+              <a:t>Habeas Data / data residency. SSO y Reporting API ya incluidos en Grande.</a:t>
+            </a:r>
+          </a:p>
+        </p:txBody>
+      </p:sp>
+      <p:sp>
+        <p:nvSpPr>
+          <p:cNvPr id="19" name="Rounded Rectangle 18"/>
           <p:cNvSpPr/>
           <p:nvPr/>
         </p:nvSpPr>
         <p:spPr>
           <a:xfrm>
-            <a:off x="6163056" y="1682496"/>
-            <a:ext cx="2715768" cy="256032"/>
-          </a:xfrm>
-          <a:prstGeom prst="rect">
-            <a:avLst/>
+            <a:off x="457200" y="4389120"/>
+            <a:ext cx="11247120" cy="786384"/>
+          </a:xfrm>
+          <a:prstGeom prst="roundRect">
+            <a:avLst>
+              <a:gd name="adj" fmla="val 5000"/>
+            </a:avLst>
           </a:prstGeom>
           <a:solidFill>
-            <a:srgbClr val="7C3AED"/>
+            <a:srgbClr val="F4F8FA"/>
           </a:solidFill>
           <a:ln>
             <a:noFill/>
@@ -4611,343 +6026,165 @@
       </p:sp>
       <p:sp>
         <p:nvSpPr>
-          <p:cNvPr id="28" name="TextBox 27"/>
-          <p:cNvSpPr txBox="1"/>
-          <p:nvPr/>
-        </p:nvSpPr>
-        <p:spPr>
-          <a:xfrm>
-            <a:off x="6163056" y="1426464"/>
-            <a:ext cx="2715768" cy="457200"/>
-          </a:xfrm>
-          <a:prstGeom prst="rect">
-            <a:avLst/>
-          </a:prstGeom>
-          <a:noFill/>
-        </p:spPr>
-        <p:txBody>
-          <a:bodyPr wrap="square" lIns="45720" rIns="45720" tIns="18288" bIns="18288">
-            <a:spAutoFit/>
-          </a:bodyPr>
-          <a:lstStyle/>
-          <a:p>
-            <a:pPr algn="ctr"/>
-            <a:r>
-              <a:rPr sz="1700" b="1" i="0">
-                <a:solidFill>
-                  <a:srgbClr val="FFFFFF"/>
-                </a:solidFill>
-                <a:latin typeface="Calibri"/>
-              </a:rPr>
-              <a:t>Profesional</a:t>
-            </a:r>
-          </a:p>
-        </p:txBody>
-      </p:sp>
-      <p:sp>
-        <p:nvSpPr>
-          <p:cNvPr id="29" name="TextBox 28"/>
-          <p:cNvSpPr txBox="1"/>
-          <p:nvPr/>
-        </p:nvSpPr>
-        <p:spPr>
-          <a:xfrm>
-            <a:off x="6163056" y="2029967"/>
-            <a:ext cx="2715768" cy="237744"/>
-          </a:xfrm>
-          <a:prstGeom prst="rect">
-            <a:avLst/>
-          </a:prstGeom>
-          <a:noFill/>
-        </p:spPr>
-        <p:txBody>
-          <a:bodyPr wrap="square" lIns="45720" rIns="45720" tIns="18288" bIns="18288">
-            <a:spAutoFit/>
-          </a:bodyPr>
-          <a:lstStyle/>
-          <a:p>
-            <a:pPr algn="ctr"/>
-            <a:r>
-              <a:rPr sz="950" b="1" i="0">
-                <a:solidFill>
-                  <a:srgbClr val="7C3AED"/>
-                </a:solidFill>
-                <a:latin typeface="Calibri"/>
-              </a:rPr>
-              <a:t>RECOMENDADO</a:t>
-            </a:r>
-          </a:p>
-        </p:txBody>
-      </p:sp>
-      <p:sp>
-        <p:nvSpPr>
-          <p:cNvPr id="30" name="TextBox 29"/>
-          <p:cNvSpPr txBox="1"/>
-          <p:nvPr/>
-        </p:nvSpPr>
-        <p:spPr>
-          <a:xfrm>
-            <a:off x="6163056" y="2286000"/>
-            <a:ext cx="2715768" cy="457200"/>
-          </a:xfrm>
-          <a:prstGeom prst="rect">
-            <a:avLst/>
-          </a:prstGeom>
-          <a:noFill/>
-        </p:spPr>
-        <p:txBody>
-          <a:bodyPr wrap="square" lIns="45720" rIns="45720" tIns="18288" bIns="18288">
-            <a:spAutoFit/>
-          </a:bodyPr>
-          <a:lstStyle/>
-          <a:p>
-            <a:pPr algn="ctr"/>
-            <a:r>
-              <a:rPr sz="1800" b="1" i="0">
-                <a:solidFill>
-                  <a:srgbClr val="1F2937"/>
-                </a:solidFill>
-                <a:latin typeface="Calibri"/>
-              </a:rPr>
-              <a:t>~$299/mes</a:t>
-            </a:r>
-          </a:p>
-        </p:txBody>
-      </p:sp>
-      <p:sp>
-        <p:nvSpPr>
-          <p:cNvPr id="31" name="TextBox 30"/>
-          <p:cNvSpPr txBox="1"/>
-          <p:nvPr/>
-        </p:nvSpPr>
-        <p:spPr>
-          <a:xfrm>
-            <a:off x="6208776" y="2798064"/>
-            <a:ext cx="2624328" cy="365760"/>
-          </a:xfrm>
-          <a:prstGeom prst="rect">
-            <a:avLst/>
-          </a:prstGeom>
-          <a:noFill/>
-        </p:spPr>
-        <p:txBody>
-          <a:bodyPr wrap="square" lIns="45720" rIns="45720" tIns="18288" bIns="18288">
-            <a:spAutoFit/>
-          </a:bodyPr>
-          <a:lstStyle/>
-          <a:p>
-            <a:pPr algn="ctr"/>
-            <a:r>
-              <a:rPr sz="950" b="0" i="0">
-                <a:solidFill>
-                  <a:srgbClr val="6B7280"/>
-                </a:solidFill>
-                <a:latin typeface="Calibri"/>
-              </a:rPr>
-              <a:t>Universidad media · hasta 1.500 est.</a:t>
-            </a:r>
-          </a:p>
-        </p:txBody>
-      </p:sp>
-      <p:sp>
-        <p:nvSpPr>
-          <p:cNvPr id="32" name="TextBox 31"/>
-          <p:cNvSpPr txBox="1"/>
-          <p:nvPr/>
-        </p:nvSpPr>
-        <p:spPr>
-          <a:xfrm>
-            <a:off x="6208776" y="3200400"/>
-            <a:ext cx="2624328" cy="310896"/>
-          </a:xfrm>
-          <a:prstGeom prst="rect">
-            <a:avLst/>
-          </a:prstGeom>
-          <a:noFill/>
-        </p:spPr>
-        <p:txBody>
-          <a:bodyPr wrap="square" lIns="45720" rIns="45720" tIns="18288" bIns="18288">
-            <a:spAutoFit/>
-          </a:bodyPr>
-          <a:lstStyle/>
-          <a:p>
-            <a:pPr algn="ctr"/>
-            <a:r>
-              <a:rPr sz="850" b="1" i="1">
-                <a:solidFill>
-                  <a:srgbClr val="7C3AED"/>
-                </a:solidFill>
-                <a:latin typeface="Calibri"/>
-              </a:rPr>
-              <a:t>self · managed con recargo</a:t>
-            </a:r>
-          </a:p>
-        </p:txBody>
-      </p:sp>
-      <p:sp>
-        <p:nvSpPr>
-          <p:cNvPr id="33" name="TextBox 32"/>
-          <p:cNvSpPr txBox="1"/>
-          <p:nvPr/>
-        </p:nvSpPr>
-        <p:spPr>
-          <a:xfrm>
-            <a:off x="6272784" y="3584448"/>
-            <a:ext cx="2532888" cy="1828800"/>
-          </a:xfrm>
-          <a:prstGeom prst="rect">
-            <a:avLst/>
-          </a:prstGeom>
-          <a:noFill/>
-        </p:spPr>
-        <p:txBody>
-          <a:bodyPr wrap="square" lIns="45720" rIns="45720" tIns="18288" bIns="18288">
-            <a:spAutoFit/>
-          </a:bodyPr>
-          <a:lstStyle/>
-          <a:p>
-            <a:pPr>
-              <a:lnSpc>
-                <a:spcPct val="100000"/>
-              </a:lnSpc>
-              <a:spcAft>
-                <a:spcPts val="500"/>
-              </a:spcAft>
-            </a:pPr>
-            <a:r>
-              <a:rPr sz="1050" b="1" i="0">
-                <a:solidFill>
-                  <a:srgbClr val="059669"/>
-                </a:solidFill>
-                <a:latin typeface="Calibri"/>
-              </a:rPr>
-              <a:t>✓ </a:t>
-            </a:r>
-            <a:r>
-              <a:rPr sz="1050" b="0" i="0">
-                <a:solidFill>
-                  <a:srgbClr val="1F2937"/>
-                </a:solidFill>
-                <a:latin typeface="Calibri"/>
-              </a:rPr>
-              <a:t>Todo Esencial</a:t>
-            </a:r>
-          </a:p>
-          <a:p>
-            <a:pPr>
-              <a:lnSpc>
-                <a:spcPct val="100000"/>
-              </a:lnSpc>
-              <a:spcAft>
-                <a:spcPts val="500"/>
-              </a:spcAft>
-            </a:pPr>
-            <a:r>
-              <a:rPr sz="1050" b="1" i="0">
-                <a:solidFill>
-                  <a:srgbClr val="059669"/>
-                </a:solidFill>
-                <a:latin typeface="Calibri"/>
-              </a:rPr>
-              <a:t>✓ </a:t>
-            </a:r>
-            <a:r>
-              <a:rPr sz="1050" b="0" i="0">
-                <a:solidFill>
-                  <a:srgbClr val="1F2937"/>
-                </a:solidFill>
-                <a:latin typeface="Calibri"/>
-              </a:rPr>
-              <a:t>+ IA: genera + califica + detección de copia</a:t>
-            </a:r>
-          </a:p>
-          <a:p>
-            <a:pPr>
-              <a:lnSpc>
-                <a:spcPct val="100000"/>
-              </a:lnSpc>
-              <a:spcAft>
-                <a:spcPts val="500"/>
-              </a:spcAft>
-            </a:pPr>
-            <a:r>
-              <a:rPr sz="1050" b="1" i="0">
-                <a:solidFill>
-                  <a:srgbClr val="059669"/>
-                </a:solidFill>
-                <a:latin typeface="Calibri"/>
-              </a:rPr>
-              <a:t>✓ </a:t>
-            </a:r>
-            <a:r>
-              <a:rPr sz="1050" b="0" i="0">
-                <a:solidFill>
-                  <a:srgbClr val="1F2937"/>
-                </a:solidFill>
-                <a:latin typeface="Calibri"/>
-              </a:rPr>
-              <a:t>+ Tutor IA, estructura académica, estadísticas</a:t>
-            </a:r>
-          </a:p>
-        </p:txBody>
-      </p:sp>
-      <p:sp>
-        <p:nvSpPr>
-          <p:cNvPr id="34" name="TextBox 33"/>
-          <p:cNvSpPr txBox="1"/>
-          <p:nvPr/>
-        </p:nvSpPr>
-        <p:spPr>
-          <a:xfrm>
-            <a:off x="6272784" y="5605272"/>
-            <a:ext cx="2496312" cy="731520"/>
-          </a:xfrm>
-          <a:prstGeom prst="rect">
-            <a:avLst/>
-          </a:prstGeom>
-          <a:noFill/>
-        </p:spPr>
-        <p:txBody>
-          <a:bodyPr wrap="square" lIns="45720" rIns="45720" tIns="18288" bIns="18288">
-            <a:spAutoFit/>
-          </a:bodyPr>
-          <a:lstStyle/>
-          <a:p>
-            <a:r>
-              <a:rPr sz="900" b="0" i="1">
-                <a:solidFill>
-                  <a:srgbClr val="6B7280"/>
-                </a:solidFill>
-                <a:latin typeface="Calibri"/>
-              </a:rPr>
-              <a:t>Sube a Institucional por: anti-fraude, código, certificados, informes</a:t>
-            </a:r>
-          </a:p>
-        </p:txBody>
-      </p:sp>
-      <p:sp>
-        <p:nvSpPr>
-          <p:cNvPr id="35" name="Rounded Rectangle 34"/>
+          <p:cNvPr id="20" name="TextBox 19"/>
+          <p:cNvSpPr txBox="1"/>
+          <p:nvPr/>
+        </p:nvSpPr>
+        <p:spPr>
+          <a:xfrm>
+            <a:off x="685800" y="4471416"/>
+            <a:ext cx="3017520" cy="365760"/>
+          </a:xfrm>
+          <a:prstGeom prst="rect">
+            <a:avLst/>
+          </a:prstGeom>
+          <a:noFill/>
+        </p:spPr>
+        <p:txBody>
+          <a:bodyPr wrap="square" anchor="t" lIns="0" rIns="0" tIns="0" bIns="0">
+            <a:spAutoFit/>
+          </a:bodyPr>
+          <a:lstStyle/>
+          <a:p>
+            <a:pPr algn="l"/>
+            <a:r>
+              <a:rPr sz="1400" b="1" i="0">
+                <a:solidFill>
+                  <a:srgbClr val="0F3E4C"/>
+                </a:solidFill>
+                <a:latin typeface="Calibri"/>
+              </a:rPr>
+              <a:t>Instituto con certificación</a:t>
+            </a:r>
+          </a:p>
+        </p:txBody>
+      </p:sp>
+      <p:sp>
+        <p:nvSpPr>
+          <p:cNvPr id="21" name="TextBox 20"/>
+          <p:cNvSpPr txBox="1"/>
+          <p:nvPr/>
+        </p:nvSpPr>
+        <p:spPr>
+          <a:xfrm>
+            <a:off x="685800" y="4809744"/>
+            <a:ext cx="3017520" cy="320040"/>
+          </a:xfrm>
+          <a:prstGeom prst="rect">
+            <a:avLst/>
+          </a:prstGeom>
+          <a:noFill/>
+        </p:spPr>
+        <p:txBody>
+          <a:bodyPr wrap="square" anchor="t" lIns="0" rIns="0" tIns="0" bIns="0">
+            <a:spAutoFit/>
+          </a:bodyPr>
+          <a:lstStyle/>
+          <a:p>
+            <a:pPr algn="l"/>
+            <a:r>
+              <a:rPr sz="1100" b="0" i="0">
+                <a:solidFill>
+                  <a:srgbClr val="647480"/>
+                </a:solidFill>
+                <a:latin typeface="Calibri"/>
+              </a:rPr>
+              <a:t>Mediana + Certificación</a:t>
+            </a:r>
+          </a:p>
+        </p:txBody>
+      </p:sp>
+      <p:sp>
+        <p:nvSpPr>
+          <p:cNvPr id="22" name="TextBox 21"/>
+          <p:cNvSpPr txBox="1"/>
+          <p:nvPr/>
+        </p:nvSpPr>
+        <p:spPr>
+          <a:xfrm>
+            <a:off x="3840480" y="4608576"/>
+            <a:ext cx="1828800" cy="365760"/>
+          </a:xfrm>
+          <a:prstGeom prst="rect">
+            <a:avLst/>
+          </a:prstGeom>
+          <a:noFill/>
+        </p:spPr>
+        <p:txBody>
+          <a:bodyPr wrap="square" anchor="ctr" lIns="0" rIns="0" tIns="0" bIns="0">
+            <a:spAutoFit/>
+          </a:bodyPr>
+          <a:lstStyle/>
+          <a:p>
+            <a:pPr algn="l"/>
+            <a:r>
+              <a:rPr sz="1500" b="1" i="0">
+                <a:solidFill>
+                  <a:srgbClr val="1E5BAF"/>
+                </a:solidFill>
+                <a:latin typeface="Calibri"/>
+              </a:rPr>
+              <a:t>$378/mes+</a:t>
+            </a:r>
+          </a:p>
+        </p:txBody>
+      </p:sp>
+      <p:sp>
+        <p:nvSpPr>
+          <p:cNvPr id="23" name="TextBox 22"/>
+          <p:cNvSpPr txBox="1"/>
+          <p:nvPr/>
+        </p:nvSpPr>
+        <p:spPr>
+          <a:xfrm>
+            <a:off x="5852160" y="4507992"/>
+            <a:ext cx="5669280" cy="566928"/>
+          </a:xfrm>
+          <a:prstGeom prst="rect">
+            <a:avLst/>
+          </a:prstGeom>
+          <a:noFill/>
+        </p:spPr>
+        <p:txBody>
+          <a:bodyPr wrap="square" anchor="ctr" lIns="0" rIns="0" tIns="0" bIns="0">
+            <a:spAutoFit/>
+          </a:bodyPr>
+          <a:lstStyle/>
+          <a:p>
+            <a:pPr algn="l"/>
+            <a:r>
+              <a:rPr sz="1100" b="0" i="0">
+                <a:solidFill>
+                  <a:srgbClr val="1F2A33"/>
+                </a:solidFill>
+                <a:latin typeface="Calibri"/>
+              </a:rPr>
+              <a:t>Diplomados con certificado formal + QR. IA administrada si no hay equipo TI.</a:t>
+            </a:r>
+          </a:p>
+        </p:txBody>
+      </p:sp>
+      <p:sp>
+        <p:nvSpPr>
+          <p:cNvPr id="24" name="Rounded Rectangle 23"/>
           <p:cNvSpPr/>
           <p:nvPr/>
         </p:nvSpPr>
         <p:spPr>
           <a:xfrm>
-            <a:off x="9052560" y="1371600"/>
-            <a:ext cx="2715768" cy="5074920"/>
+            <a:off x="457200" y="5257800"/>
+            <a:ext cx="11247120" cy="786384"/>
           </a:xfrm>
           <a:prstGeom prst="roundRect">
             <a:avLst>
-              <a:gd name="adj" fmla="val 4000"/>
+              <a:gd name="adj" fmla="val 5000"/>
             </a:avLst>
           </a:prstGeom>
           <a:solidFill>
-            <a:srgbClr val="F9FAFB"/>
+            <a:srgbClr val="F4F8FA"/>
           </a:solidFill>
-          <a:ln w="12700">
-            <a:solidFill>
-              <a:srgbClr val="E5E7EB"/>
-            </a:solidFill>
+          <a:ln>
+            <a:noFill/>
           </a:ln>
           <a:effectLst/>
         </p:spPr>
@@ -4975,22 +6212,320 @@
       </p:sp>
       <p:sp>
         <p:nvSpPr>
-          <p:cNvPr id="36" name="Rounded Rectangle 35"/>
+          <p:cNvPr id="25" name="TextBox 24"/>
+          <p:cNvSpPr txBox="1"/>
+          <p:nvPr/>
+        </p:nvSpPr>
+        <p:spPr>
+          <a:xfrm>
+            <a:off x="685800" y="5340096"/>
+            <a:ext cx="3017520" cy="365760"/>
+          </a:xfrm>
+          <a:prstGeom prst="rect">
+            <a:avLst/>
+          </a:prstGeom>
+          <a:noFill/>
+        </p:spPr>
+        <p:txBody>
+          <a:bodyPr wrap="square" anchor="t" lIns="0" rIns="0" tIns="0" bIns="0">
+            <a:spAutoFit/>
+          </a:bodyPr>
+          <a:lstStyle/>
+          <a:p>
+            <a:pPr algn="l"/>
+            <a:r>
+              <a:rPr sz="1400" b="1" i="0">
+                <a:solidFill>
+                  <a:srgbClr val="0F3E4C"/>
+                </a:solidFill>
+                <a:latin typeface="Calibri"/>
+              </a:rPr>
+              <a:t>Universidad grande operada</a:t>
+            </a:r>
+          </a:p>
+        </p:txBody>
+      </p:sp>
+      <p:sp>
+        <p:nvSpPr>
+          <p:cNvPr id="26" name="TextBox 25"/>
+          <p:cNvSpPr txBox="1"/>
+          <p:nvPr/>
+        </p:nvSpPr>
+        <p:spPr>
+          <a:xfrm>
+            <a:off x="685800" y="5678424"/>
+            <a:ext cx="3017520" cy="320040"/>
+          </a:xfrm>
+          <a:prstGeom prst="rect">
+            <a:avLst/>
+          </a:prstGeom>
+          <a:noFill/>
+        </p:spPr>
+        <p:txBody>
+          <a:bodyPr wrap="square" anchor="t" lIns="0" rIns="0" tIns="0" bIns="0">
+            <a:spAutoFit/>
+          </a:bodyPr>
+          <a:lstStyle/>
+          <a:p>
+            <a:pPr algn="l"/>
+            <a:r>
+              <a:rPr sz="1100" b="0" i="0">
+                <a:solidFill>
+                  <a:srgbClr val="647480"/>
+                </a:solidFill>
+                <a:latin typeface="Calibri"/>
+              </a:rPr>
+              <a:t>Grande Admin + Aislamiento</a:t>
+            </a:r>
+          </a:p>
+        </p:txBody>
+      </p:sp>
+      <p:sp>
+        <p:nvSpPr>
+          <p:cNvPr id="27" name="TextBox 26"/>
+          <p:cNvSpPr txBox="1"/>
+          <p:nvPr/>
+        </p:nvSpPr>
+        <p:spPr>
+          <a:xfrm>
+            <a:off x="3840480" y="5477256"/>
+            <a:ext cx="1828800" cy="365760"/>
+          </a:xfrm>
+          <a:prstGeom prst="rect">
+            <a:avLst/>
+          </a:prstGeom>
+          <a:noFill/>
+        </p:spPr>
+        <p:txBody>
+          <a:bodyPr wrap="square" anchor="ctr" lIns="0" rIns="0" tIns="0" bIns="0">
+            <a:spAutoFit/>
+          </a:bodyPr>
+          <a:lstStyle/>
+          <a:p>
+            <a:pPr algn="l"/>
+            <a:r>
+              <a:rPr sz="1500" b="1" i="0">
+                <a:solidFill>
+                  <a:srgbClr val="1E5BAF"/>
+                </a:solidFill>
+                <a:latin typeface="Calibri"/>
+              </a:rPr>
+              <a:t>$1.198/mes</a:t>
+            </a:r>
+          </a:p>
+        </p:txBody>
+      </p:sp>
+      <p:sp>
+        <p:nvSpPr>
+          <p:cNvPr id="28" name="TextBox 27"/>
+          <p:cNvSpPr txBox="1"/>
+          <p:nvPr/>
+        </p:nvSpPr>
+        <p:spPr>
+          <a:xfrm>
+            <a:off x="5852160" y="5376672"/>
+            <a:ext cx="5669280" cy="566928"/>
+          </a:xfrm>
+          <a:prstGeom prst="rect">
+            <a:avLst/>
+          </a:prstGeom>
+          <a:noFill/>
+        </p:spPr>
+        <p:txBody>
+          <a:bodyPr wrap="square" anchor="ctr" lIns="0" rIns="0" tIns="0" bIns="0">
+            <a:spAutoFit/>
+          </a:bodyPr>
+          <a:lstStyle/>
+          <a:p>
+            <a:pPr algn="l"/>
+            <a:r>
+              <a:rPr sz="1100" b="0" i="0">
+                <a:solidFill>
+                  <a:srgbClr val="1F2A33"/>
+                </a:solidFill>
+                <a:latin typeface="Calibri"/>
+              </a:rPr>
+              <a:t>ExamLab opera el tenant + aislamiento físico. Sin equipo propio del cliente.</a:t>
+            </a:r>
+          </a:p>
+        </p:txBody>
+      </p:sp>
+      <p:sp>
+        <p:nvSpPr>
+          <p:cNvPr id="29" name="TextBox 28"/>
+          <p:cNvSpPr txBox="1"/>
+          <p:nvPr/>
+        </p:nvSpPr>
+        <p:spPr>
+          <a:xfrm>
+            <a:off x="457200" y="6492240"/>
+            <a:ext cx="7315200" cy="274320"/>
+          </a:xfrm>
+          <a:prstGeom prst="rect">
+            <a:avLst/>
+          </a:prstGeom>
+          <a:noFill/>
+        </p:spPr>
+        <p:txBody>
+          <a:bodyPr wrap="square" anchor="t" lIns="0" rIns="0" tIns="0" bIns="0">
+            <a:spAutoFit/>
+          </a:bodyPr>
+          <a:lstStyle/>
+          <a:p>
+            <a:pPr algn="l"/>
+            <a:r>
+              <a:rPr sz="900" b="0" i="0">
+                <a:solidFill>
+                  <a:srgbClr val="647480"/>
+                </a:solidFill>
+                <a:latin typeface="Calibri"/>
+              </a:rPr>
+              <a:t>ExamLab · Modelo modular — planes + add-ons</a:t>
+            </a:r>
+          </a:p>
+        </p:txBody>
+      </p:sp>
+      <p:sp>
+        <p:nvSpPr>
+          <p:cNvPr id="30" name="TextBox 29"/>
+          <p:cNvSpPr txBox="1"/>
+          <p:nvPr/>
+        </p:nvSpPr>
+        <p:spPr>
+          <a:xfrm>
+            <a:off x="11430000" y="6492240"/>
+            <a:ext cx="457200" cy="274320"/>
+          </a:xfrm>
+          <a:prstGeom prst="rect">
+            <a:avLst/>
+          </a:prstGeom>
+          <a:noFill/>
+        </p:spPr>
+        <p:txBody>
+          <a:bodyPr wrap="square" anchor="t" lIns="0" rIns="0" tIns="0" bIns="0">
+            <a:spAutoFit/>
+          </a:bodyPr>
+          <a:lstStyle/>
+          <a:p>
+            <a:pPr algn="r"/>
+            <a:r>
+              <a:rPr sz="900" b="0" i="0">
+                <a:solidFill>
+                  <a:srgbClr val="647480"/>
+                </a:solidFill>
+                <a:latin typeface="Calibri"/>
+              </a:rPr>
+              <a:t>4</a:t>
+            </a:r>
+          </a:p>
+        </p:txBody>
+      </p:sp>
+    </p:spTree>
+  </p:cSld>
+  <p:clrMapOvr>
+    <a:masterClrMapping/>
+  </p:clrMapOvr>
+</p:sld>
+</file>
+
+<file path=ppt/slides/slide5.xml><?xml version="1.0" encoding="utf-8"?>
+<p:sld xmlns:a="http://schemas.openxmlformats.org/drawingml/2006/main" xmlns:p="http://schemas.openxmlformats.org/presentationml/2006/main" xmlns:r="http://schemas.openxmlformats.org/officeDocument/2006/relationships">
+  <p:cSld>
+    <p:spTree>
+      <p:nvGrpSpPr>
+        <p:cNvPr id="1" name=""/>
+        <p:cNvGrpSpPr/>
+        <p:nvPr/>
+      </p:nvGrpSpPr>
+      <p:grpSpPr/>
+      <p:sp>
+        <p:nvSpPr>
+          <p:cNvPr id="2" name="TextBox 1"/>
+          <p:cNvSpPr txBox="1"/>
+          <p:nvPr/>
+        </p:nvSpPr>
+        <p:spPr>
+          <a:xfrm>
+            <a:off x="457200" y="365760"/>
+            <a:ext cx="10972800" cy="365760"/>
+          </a:xfrm>
+          <a:prstGeom prst="rect">
+            <a:avLst/>
+          </a:prstGeom>
+          <a:noFill/>
+        </p:spPr>
+        <p:txBody>
+          <a:bodyPr wrap="square" anchor="t" lIns="0" rIns="0" tIns="0" bIns="0">
+            <a:spAutoFit/>
+          </a:bodyPr>
+          <a:lstStyle/>
+          <a:p>
+            <a:pPr algn="l"/>
+            <a:r>
+              <a:rPr sz="1200" b="1" i="0">
+                <a:solidFill>
+                  <a:srgbClr val="2EB8C7"/>
+                </a:solidFill>
+                <a:latin typeface="Calibri"/>
+              </a:rPr>
+              <a:t>REGLAS DE COHERENCIA</a:t>
+            </a:r>
+          </a:p>
+        </p:txBody>
+      </p:sp>
+      <p:sp>
+        <p:nvSpPr>
+          <p:cNvPr id="3" name="TextBox 2"/>
+          <p:cNvSpPr txBox="1"/>
+          <p:nvPr/>
+        </p:nvSpPr>
+        <p:spPr>
+          <a:xfrm>
+            <a:off x="457200" y="713232"/>
+            <a:ext cx="11247120" cy="731520"/>
+          </a:xfrm>
+          <a:prstGeom prst="rect">
+            <a:avLst/>
+          </a:prstGeom>
+          <a:noFill/>
+        </p:spPr>
+        <p:txBody>
+          <a:bodyPr wrap="square" anchor="t" lIns="0" rIns="0" tIns="0" bIns="0">
+            <a:spAutoFit/>
+          </a:bodyPr>
+          <a:lstStyle/>
+          <a:p>
+            <a:pPr algn="l"/>
+            <a:r>
+              <a:rPr sz="3000" b="1" i="0">
+                <a:solidFill>
+                  <a:srgbClr val="0F3E4C"/>
+                </a:solidFill>
+                <a:latin typeface="Calibri"/>
+              </a:rPr>
+              <a:t>Qué requiere qué — y qué ya viene incluido</a:t>
+            </a:r>
+          </a:p>
+        </p:txBody>
+      </p:sp>
+      <p:sp>
+        <p:nvSpPr>
+          <p:cNvPr id="4" name="Rounded Rectangle 3"/>
           <p:cNvSpPr/>
           <p:nvPr/>
         </p:nvSpPr>
         <p:spPr>
           <a:xfrm>
-            <a:off x="9052560" y="1371600"/>
-            <a:ext cx="2715768" cy="566928"/>
+            <a:off x="457200" y="1783080"/>
+            <a:ext cx="5486400" cy="3931920"/>
           </a:xfrm>
           <a:prstGeom prst="roundRect">
             <a:avLst>
-              <a:gd name="adj" fmla="val 6000"/>
+              <a:gd name="adj" fmla="val 5000"/>
             </a:avLst>
           </a:prstGeom>
           <a:solidFill>
-            <a:srgbClr val="4338CA"/>
+            <a:srgbClr val="F4F8FA"/>
           </a:solidFill>
           <a:ln>
             <a:noFill/>
@@ -5021,23 +6556,202 @@
       </p:sp>
       <p:sp>
         <p:nvSpPr>
-          <p:cNvPr id="37" name="Rectangle 36"/>
+          <p:cNvPr id="5" name="TextBox 4"/>
+          <p:cNvSpPr txBox="1"/>
+          <p:nvPr/>
+        </p:nvSpPr>
+        <p:spPr>
+          <a:xfrm>
+            <a:off x="731520" y="2011680"/>
+            <a:ext cx="4937760" cy="365760"/>
+          </a:xfrm>
+          <a:prstGeom prst="rect">
+            <a:avLst/>
+          </a:prstGeom>
+          <a:noFill/>
+        </p:spPr>
+        <p:txBody>
+          <a:bodyPr wrap="square" anchor="t" lIns="0" rIns="0" tIns="0" bIns="0">
+            <a:spAutoFit/>
+          </a:bodyPr>
+          <a:lstStyle/>
+          <a:p>
+            <a:pPr algn="l"/>
+            <a:r>
+              <a:rPr sz="1500" b="1" i="0">
+                <a:solidFill>
+                  <a:srgbClr val="0F3E4C"/>
+                </a:solidFill>
+                <a:latin typeface="Calibri"/>
+              </a:rPr>
+              <a:t>Add-ons que exigen un plan mínimo</a:t>
+            </a:r>
+          </a:p>
+        </p:txBody>
+      </p:sp>
+      <p:sp>
+        <p:nvSpPr>
+          <p:cNvPr id="6" name="TextBox 5"/>
+          <p:cNvSpPr txBox="1"/>
+          <p:nvPr/>
+        </p:nvSpPr>
+        <p:spPr>
+          <a:xfrm>
+            <a:off x="914400" y="2606040"/>
+            <a:ext cx="4754880" cy="365760"/>
+          </a:xfrm>
+          <a:prstGeom prst="rect">
+            <a:avLst/>
+          </a:prstGeom>
+          <a:noFill/>
+        </p:spPr>
+        <p:txBody>
+          <a:bodyPr wrap="square" anchor="t" lIns="0" rIns="0" tIns="0" bIns="0">
+            <a:spAutoFit/>
+          </a:bodyPr>
+          <a:lstStyle/>
+          <a:p>
+            <a:pPr algn="l"/>
+            <a:r>
+              <a:rPr sz="1300" b="0" i="0">
+                <a:solidFill>
+                  <a:srgbClr val="1F2A33"/>
+                </a:solidFill>
+                <a:latin typeface="Calibri"/>
+              </a:rPr>
+              <a:t>• Code runner ilimitado → Mediana+</a:t>
+            </a:r>
+          </a:p>
+        </p:txBody>
+      </p:sp>
+      <p:sp>
+        <p:nvSpPr>
+          <p:cNvPr id="7" name="TextBox 6"/>
+          <p:cNvSpPr txBox="1"/>
+          <p:nvPr/>
+        </p:nvSpPr>
+        <p:spPr>
+          <a:xfrm>
+            <a:off x="914400" y="3108960"/>
+            <a:ext cx="4754880" cy="365760"/>
+          </a:xfrm>
+          <a:prstGeom prst="rect">
+            <a:avLst/>
+          </a:prstGeom>
+          <a:noFill/>
+        </p:spPr>
+        <p:txBody>
+          <a:bodyPr wrap="square" anchor="t" lIns="0" rIns="0" tIns="0" bIns="0">
+            <a:spAutoFit/>
+          </a:bodyPr>
+          <a:lstStyle/>
+          <a:p>
+            <a:pPr algn="l"/>
+            <a:r>
+              <a:rPr sz="1300" b="0" i="0">
+                <a:solidFill>
+                  <a:srgbClr val="1F2A33"/>
+                </a:solidFill>
+                <a:latin typeface="Calibri"/>
+              </a:rPr>
+              <a:t>• SSO / SAML → Mediana+</a:t>
+            </a:r>
+          </a:p>
+        </p:txBody>
+      </p:sp>
+      <p:sp>
+        <p:nvSpPr>
+          <p:cNvPr id="8" name="TextBox 7"/>
+          <p:cNvSpPr txBox="1"/>
+          <p:nvPr/>
+        </p:nvSpPr>
+        <p:spPr>
+          <a:xfrm>
+            <a:off x="914400" y="3611880"/>
+            <a:ext cx="4754880" cy="365760"/>
+          </a:xfrm>
+          <a:prstGeom prst="rect">
+            <a:avLst/>
+          </a:prstGeom>
+          <a:noFill/>
+        </p:spPr>
+        <p:txBody>
+          <a:bodyPr wrap="square" anchor="t" lIns="0" rIns="0" tIns="0" bIns="0">
+            <a:spAutoFit/>
+          </a:bodyPr>
+          <a:lstStyle/>
+          <a:p>
+            <a:pPr algn="l"/>
+            <a:r>
+              <a:rPr sz="1300" b="0" i="0">
+                <a:solidFill>
+                  <a:srgbClr val="1F2A33"/>
+                </a:solidFill>
+                <a:latin typeface="Calibri"/>
+              </a:rPr>
+              <a:t>• Aislamiento dedicado → Grande+</a:t>
+            </a:r>
+          </a:p>
+        </p:txBody>
+      </p:sp>
+      <p:sp>
+        <p:nvSpPr>
+          <p:cNvPr id="9" name="TextBox 8"/>
+          <p:cNvSpPr txBox="1"/>
+          <p:nvPr/>
+        </p:nvSpPr>
+        <p:spPr>
+          <a:xfrm>
+            <a:off x="731520" y="4297680"/>
+            <a:ext cx="4937760" cy="1280160"/>
+          </a:xfrm>
+          <a:prstGeom prst="rect">
+            <a:avLst/>
+          </a:prstGeom>
+          <a:noFill/>
+        </p:spPr>
+        <p:txBody>
+          <a:bodyPr wrap="square" anchor="t" lIns="0" rIns="0" tIns="0" bIns="0">
+            <a:spAutoFit/>
+          </a:bodyPr>
+          <a:lstStyle/>
+          <a:p>
+            <a:pPr algn="l"/>
+            <a:r>
+              <a:rPr sz="1100" b="0" i="1">
+                <a:solidFill>
+                  <a:srgbClr val="647480"/>
+                </a:solidFill>
+                <a:latin typeface="Calibri"/>
+              </a:rPr>
+              <a:t>Motivo: en planes chicos la ejecución de código ya está incluida, no hay directorio corporativo para SSO, y el aislamiento no amortiza su setup. Se habilitan donde aportan.</a:t>
+            </a:r>
+          </a:p>
+        </p:txBody>
+      </p:sp>
+      <p:sp>
+        <p:nvSpPr>
+          <p:cNvPr id="10" name="Rounded Rectangle 9"/>
           <p:cNvSpPr/>
           <p:nvPr/>
         </p:nvSpPr>
         <p:spPr>
           <a:xfrm>
-            <a:off x="9052560" y="1682496"/>
-            <a:ext cx="2715768" cy="256032"/>
-          </a:xfrm>
-          <a:prstGeom prst="rect">
-            <a:avLst/>
+            <a:off x="6245352" y="1783080"/>
+            <a:ext cx="5486400" cy="3931920"/>
+          </a:xfrm>
+          <a:prstGeom prst="roundRect">
+            <a:avLst>
+              <a:gd name="adj" fmla="val 5000"/>
+            </a:avLst>
           </a:prstGeom>
           <a:solidFill>
-            <a:srgbClr val="4338CA"/>
+            <a:srgbClr val="F0F9FB"/>
           </a:solidFill>
-          <a:ln>
-            <a:noFill/>
+          <a:ln w="19050">
+            <a:solidFill>
+              <a:srgbClr val="2EB8C7"/>
+            </a:solidFill>
           </a:ln>
           <a:effectLst/>
         </p:spPr>
@@ -5065,315 +6779,414 @@
       </p:sp>
       <p:sp>
         <p:nvSpPr>
-          <p:cNvPr id="38" name="TextBox 37"/>
-          <p:cNvSpPr txBox="1"/>
-          <p:nvPr/>
-        </p:nvSpPr>
-        <p:spPr>
-          <a:xfrm>
-            <a:off x="9052560" y="1426464"/>
-            <a:ext cx="2715768" cy="457200"/>
-          </a:xfrm>
-          <a:prstGeom prst="rect">
-            <a:avLst/>
-          </a:prstGeom>
-          <a:noFill/>
-        </p:spPr>
-        <p:txBody>
-          <a:bodyPr wrap="square" lIns="45720" rIns="45720" tIns="18288" bIns="18288">
-            <a:spAutoFit/>
-          </a:bodyPr>
+          <p:cNvPr id="11" name="TextBox 10"/>
+          <p:cNvSpPr txBox="1"/>
+          <p:nvPr/>
+        </p:nvSpPr>
+        <p:spPr>
+          <a:xfrm>
+            <a:off x="6519672" y="2011680"/>
+            <a:ext cx="4937760" cy="365760"/>
+          </a:xfrm>
+          <a:prstGeom prst="rect">
+            <a:avLst/>
+          </a:prstGeom>
+          <a:noFill/>
+        </p:spPr>
+        <p:txBody>
+          <a:bodyPr wrap="square" anchor="t" lIns="0" rIns="0" tIns="0" bIns="0">
+            <a:spAutoFit/>
+          </a:bodyPr>
+          <a:lstStyle/>
+          <a:p>
+            <a:pPr algn="l"/>
+            <a:r>
+              <a:rPr sz="1500" b="1" i="0">
+                <a:solidFill>
+                  <a:srgbClr val="0F3E4C"/>
+                </a:solidFill>
+                <a:latin typeface="Calibri"/>
+              </a:rPr>
+              <a:t>Incluido sin cargo en tiers altos</a:t>
+            </a:r>
+          </a:p>
+        </p:txBody>
+      </p:sp>
+      <p:sp>
+        <p:nvSpPr>
+          <p:cNvPr id="12" name="TextBox 11"/>
+          <p:cNvSpPr txBox="1"/>
+          <p:nvPr/>
+        </p:nvSpPr>
+        <p:spPr>
+          <a:xfrm>
+            <a:off x="6702552" y="2606040"/>
+            <a:ext cx="4754880" cy="411480"/>
+          </a:xfrm>
+          <a:prstGeom prst="rect">
+            <a:avLst/>
+          </a:prstGeom>
+          <a:noFill/>
+        </p:spPr>
+        <p:txBody>
+          <a:bodyPr wrap="square" anchor="t" lIns="0" rIns="0" tIns="0" bIns="0">
+            <a:spAutoFit/>
+          </a:bodyPr>
+          <a:lstStyle/>
+          <a:p>
+            <a:pPr algn="l"/>
+            <a:r>
+              <a:rPr sz="1200" b="0" i="0">
+                <a:solidFill>
+                  <a:srgbClr val="1F2A33"/>
+                </a:solidFill>
+                <a:latin typeface="Calibri"/>
+              </a:rPr>
+              <a:t>✓ SSO / SAML → incluido en Grande</a:t>
+            </a:r>
+          </a:p>
+        </p:txBody>
+      </p:sp>
+      <p:sp>
+        <p:nvSpPr>
+          <p:cNvPr id="13" name="TextBox 12"/>
+          <p:cNvSpPr txBox="1"/>
+          <p:nvPr/>
+        </p:nvSpPr>
+        <p:spPr>
+          <a:xfrm>
+            <a:off x="6702552" y="3108960"/>
+            <a:ext cx="4754880" cy="411480"/>
+          </a:xfrm>
+          <a:prstGeom prst="rect">
+            <a:avLst/>
+          </a:prstGeom>
+          <a:noFill/>
+        </p:spPr>
+        <p:txBody>
+          <a:bodyPr wrap="square" anchor="t" lIns="0" rIns="0" tIns="0" bIns="0">
+            <a:spAutoFit/>
+          </a:bodyPr>
+          <a:lstStyle/>
+          <a:p>
+            <a:pPr algn="l"/>
+            <a:r>
+              <a:rPr sz="1200" b="0" i="0">
+                <a:solidFill>
+                  <a:srgbClr val="1F2A33"/>
+                </a:solidFill>
+                <a:latin typeface="Calibri"/>
+              </a:rPr>
+              <a:t>✓ Reporting API → incluido en Grande</a:t>
+            </a:r>
+          </a:p>
+        </p:txBody>
+      </p:sp>
+      <p:sp>
+        <p:nvSpPr>
+          <p:cNvPr id="14" name="TextBox 13"/>
+          <p:cNvSpPr txBox="1"/>
+          <p:nvPr/>
+        </p:nvSpPr>
+        <p:spPr>
+          <a:xfrm>
+            <a:off x="6702552" y="3611880"/>
+            <a:ext cx="4754880" cy="411480"/>
+          </a:xfrm>
+          <a:prstGeom prst="rect">
+            <a:avLst/>
+          </a:prstGeom>
+          <a:noFill/>
+        </p:spPr>
+        <p:txBody>
+          <a:bodyPr wrap="square" anchor="t" lIns="0" rIns="0" tIns="0" bIns="0">
+            <a:spAutoFit/>
+          </a:bodyPr>
+          <a:lstStyle/>
+          <a:p>
+            <a:pPr algn="l"/>
+            <a:r>
+              <a:rPr sz="1200" b="0" i="0">
+                <a:solidFill>
+                  <a:srgbClr val="1F2A33"/>
+                </a:solidFill>
+                <a:latin typeface="Calibri"/>
+              </a:rPr>
+              <a:t>✓ Onboarding guiado → 4–8h en Mediana/Grande</a:t>
+            </a:r>
+          </a:p>
+        </p:txBody>
+      </p:sp>
+      <p:sp>
+        <p:nvSpPr>
+          <p:cNvPr id="15" name="TextBox 14"/>
+          <p:cNvSpPr txBox="1"/>
+          <p:nvPr/>
+        </p:nvSpPr>
+        <p:spPr>
+          <a:xfrm>
+            <a:off x="6702552" y="4114800"/>
+            <a:ext cx="4754880" cy="411480"/>
+          </a:xfrm>
+          <a:prstGeom prst="rect">
+            <a:avLst/>
+          </a:prstGeom>
+          <a:noFill/>
+        </p:spPr>
+        <p:txBody>
+          <a:bodyPr wrap="square" anchor="t" lIns="0" rIns="0" tIns="0" bIns="0">
+            <a:spAutoFit/>
+          </a:bodyPr>
+          <a:lstStyle/>
+          <a:p>
+            <a:pPr algn="l"/>
+            <a:r>
+              <a:rPr sz="1200" b="0" i="0">
+                <a:solidFill>
+                  <a:srgbClr val="1F2A33"/>
+                </a:solidFill>
+                <a:latin typeface="Calibri"/>
+              </a:rPr>
+              <a:t>✓ Backups extendidos → Mediana (30d) / Grande (90d)</a:t>
+            </a:r>
+          </a:p>
+        </p:txBody>
+      </p:sp>
+      <p:sp>
+        <p:nvSpPr>
+          <p:cNvPr id="16" name="TextBox 15"/>
+          <p:cNvSpPr txBox="1"/>
+          <p:nvPr/>
+        </p:nvSpPr>
+        <p:spPr>
+          <a:xfrm>
+            <a:off x="6519672" y="4937760"/>
+            <a:ext cx="4937760" cy="640080"/>
+          </a:xfrm>
+          <a:prstGeom prst="rect">
+            <a:avLst/>
+          </a:prstGeom>
+          <a:noFill/>
+        </p:spPr>
+        <p:txBody>
+          <a:bodyPr wrap="square" anchor="t" lIns="0" rIns="0" tIns="0" bIns="0">
+            <a:spAutoFit/>
+          </a:bodyPr>
+          <a:lstStyle/>
+          <a:p>
+            <a:pPr algn="l"/>
+            <a:r>
+              <a:rPr sz="1100" b="0" i="1">
+                <a:solidFill>
+                  <a:srgbClr val="0F3E4C"/>
+                </a:solidFill>
+                <a:latin typeface="Calibri"/>
+              </a:rPr>
+              <a:t>A mayor plan, más add-ons vienen incluidos: no pagas dos veces por lo mismo.</a:t>
+            </a:r>
+          </a:p>
+        </p:txBody>
+      </p:sp>
+      <p:sp>
+        <p:nvSpPr>
+          <p:cNvPr id="17" name="TextBox 16"/>
+          <p:cNvSpPr txBox="1"/>
+          <p:nvPr/>
+        </p:nvSpPr>
+        <p:spPr>
+          <a:xfrm>
+            <a:off x="457200" y="6492240"/>
+            <a:ext cx="7315200" cy="274320"/>
+          </a:xfrm>
+          <a:prstGeom prst="rect">
+            <a:avLst/>
+          </a:prstGeom>
+          <a:noFill/>
+        </p:spPr>
+        <p:txBody>
+          <a:bodyPr wrap="square" anchor="t" lIns="0" rIns="0" tIns="0" bIns="0">
+            <a:spAutoFit/>
+          </a:bodyPr>
+          <a:lstStyle/>
+          <a:p>
+            <a:pPr algn="l"/>
+            <a:r>
+              <a:rPr sz="900" b="0" i="0">
+                <a:solidFill>
+                  <a:srgbClr val="647480"/>
+                </a:solidFill>
+                <a:latin typeface="Calibri"/>
+              </a:rPr>
+              <a:t>ExamLab · Modelo modular — planes + add-ons</a:t>
+            </a:r>
+          </a:p>
+        </p:txBody>
+      </p:sp>
+      <p:sp>
+        <p:nvSpPr>
+          <p:cNvPr id="18" name="TextBox 17"/>
+          <p:cNvSpPr txBox="1"/>
+          <p:nvPr/>
+        </p:nvSpPr>
+        <p:spPr>
+          <a:xfrm>
+            <a:off x="11430000" y="6492240"/>
+            <a:ext cx="457200" cy="274320"/>
+          </a:xfrm>
+          <a:prstGeom prst="rect">
+            <a:avLst/>
+          </a:prstGeom>
+          <a:noFill/>
+        </p:spPr>
+        <p:txBody>
+          <a:bodyPr wrap="square" anchor="t" lIns="0" rIns="0" tIns="0" bIns="0">
+            <a:spAutoFit/>
+          </a:bodyPr>
+          <a:lstStyle/>
+          <a:p>
+            <a:pPr algn="r"/>
+            <a:r>
+              <a:rPr sz="900" b="0" i="0">
+                <a:solidFill>
+                  <a:srgbClr val="647480"/>
+                </a:solidFill>
+                <a:latin typeface="Calibri"/>
+              </a:rPr>
+              <a:t>5</a:t>
+            </a:r>
+          </a:p>
+        </p:txBody>
+      </p:sp>
+    </p:spTree>
+  </p:cSld>
+  <p:clrMapOvr>
+    <a:masterClrMapping/>
+  </p:clrMapOvr>
+</p:sld>
+</file>
+
+<file path=ppt/slides/slide6.xml><?xml version="1.0" encoding="utf-8"?>
+<p:sld xmlns:a="http://schemas.openxmlformats.org/drawingml/2006/main" xmlns:p="http://schemas.openxmlformats.org/presentationml/2006/main" xmlns:r="http://schemas.openxmlformats.org/officeDocument/2006/relationships">
+  <p:cSld>
+    <p:spTree>
+      <p:nvGrpSpPr>
+        <p:cNvPr id="1" name=""/>
+        <p:cNvGrpSpPr/>
+        <p:nvPr/>
+      </p:nvGrpSpPr>
+      <p:grpSpPr/>
+      <p:sp>
+        <p:nvSpPr>
+          <p:cNvPr id="2" name="Rounded Rectangle 1"/>
+          <p:cNvSpPr/>
+          <p:nvPr/>
+        </p:nvSpPr>
+        <p:spPr>
+          <a:xfrm>
+            <a:off x="0" y="0"/>
+            <a:ext cx="12191695" cy="6858000"/>
+          </a:xfrm>
+          <a:prstGeom prst="roundRect">
+            <a:avLst>
+              <a:gd name="adj" fmla="val 5000"/>
+            </a:avLst>
+          </a:prstGeom>
+          <a:solidFill>
+            <a:srgbClr val="0F3E4C"/>
+          </a:solidFill>
+          <a:ln>
+            <a:noFill/>
+          </a:ln>
+          <a:effectLst/>
+        </p:spPr>
+        <p:style>
+          <a:lnRef idx="1">
+            <a:schemeClr val="accent1"/>
+          </a:lnRef>
+          <a:fillRef idx="3">
+            <a:schemeClr val="accent1"/>
+          </a:fillRef>
+          <a:effectRef idx="2">
+            <a:schemeClr val="accent1"/>
+          </a:effectRef>
+          <a:fontRef idx="minor">
+            <a:schemeClr val="lt1"/>
+          </a:fontRef>
+        </p:style>
+        <p:txBody>
+          <a:bodyPr rtlCol="0" anchor="ctr"/>
           <a:lstStyle/>
           <a:p>
             <a:pPr algn="ctr"/>
-            <a:r>
-              <a:rPr sz="1700" b="1" i="0">
+          </a:p>
+        </p:txBody>
+      </p:sp>
+      <p:sp>
+        <p:nvSpPr>
+          <p:cNvPr id="3" name="TextBox 2"/>
+          <p:cNvSpPr txBox="1"/>
+          <p:nvPr/>
+        </p:nvSpPr>
+        <p:spPr>
+          <a:xfrm>
+            <a:off x="914400" y="2468880"/>
+            <a:ext cx="10332720" cy="914400"/>
+          </a:xfrm>
+          <a:prstGeom prst="rect">
+            <a:avLst/>
+          </a:prstGeom>
+          <a:noFill/>
+        </p:spPr>
+        <p:txBody>
+          <a:bodyPr wrap="square" anchor="t" lIns="0" rIns="0" tIns="0" bIns="0">
+            <a:spAutoFit/>
+          </a:bodyPr>
+          <a:lstStyle/>
+          <a:p>
+            <a:pPr algn="l"/>
+            <a:r>
+              <a:rPr sz="4400" b="1" i="0">
                 <a:solidFill>
                   <a:srgbClr val="FFFFFF"/>
                 </a:solidFill>
                 <a:latin typeface="Calibri"/>
               </a:rPr>
-              <a:t>Institucional</a:t>
-            </a:r>
-          </a:p>
-        </p:txBody>
-      </p:sp>
-      <p:sp>
-        <p:nvSpPr>
-          <p:cNvPr id="39" name="TextBox 38"/>
-          <p:cNvSpPr txBox="1"/>
-          <p:nvPr/>
-        </p:nvSpPr>
-        <p:spPr>
-          <a:xfrm>
-            <a:off x="9052560" y="2286000"/>
-            <a:ext cx="2715768" cy="457200"/>
-          </a:xfrm>
-          <a:prstGeom prst="rect">
-            <a:avLst/>
-          </a:prstGeom>
-          <a:noFill/>
-        </p:spPr>
-        <p:txBody>
-          <a:bodyPr wrap="square" lIns="45720" rIns="45720" tIns="18288" bIns="18288">
-            <a:spAutoFit/>
-          </a:bodyPr>
-          <a:lstStyle/>
-          <a:p>
-            <a:pPr algn="ctr"/>
-            <a:r>
-              <a:rPr sz="1300" b="1" i="0">
-                <a:solidFill>
-                  <a:srgbClr val="1F2937"/>
-                </a:solidFill>
-                <a:latin typeface="Calibri"/>
-              </a:rPr>
-              <a:t>~$999 · $1.900 adm.</a:t>
-            </a:r>
-          </a:p>
-        </p:txBody>
-      </p:sp>
-      <p:sp>
-        <p:nvSpPr>
-          <p:cNvPr id="40" name="TextBox 39"/>
-          <p:cNvSpPr txBox="1"/>
-          <p:nvPr/>
-        </p:nvSpPr>
-        <p:spPr>
-          <a:xfrm>
-            <a:off x="9098280" y="2798064"/>
-            <a:ext cx="2624328" cy="365760"/>
-          </a:xfrm>
-          <a:prstGeom prst="rect">
-            <a:avLst/>
-          </a:prstGeom>
-          <a:noFill/>
-        </p:spPr>
-        <p:txBody>
-          <a:bodyPr wrap="square" lIns="45720" rIns="45720" tIns="18288" bIns="18288">
-            <a:spAutoFit/>
-          </a:bodyPr>
-          <a:lstStyle/>
-          <a:p>
-            <a:pPr algn="ctr"/>
-            <a:r>
-              <a:rPr sz="950" b="0" i="0">
-                <a:solidFill>
-                  <a:srgbClr val="6B7280"/>
-                </a:solidFill>
-                <a:latin typeface="Calibri"/>
-              </a:rPr>
-              <a:t>Institución grande · hasta 5.000 est.</a:t>
-            </a:r>
-          </a:p>
-        </p:txBody>
-      </p:sp>
-      <p:sp>
-        <p:nvSpPr>
-          <p:cNvPr id="41" name="TextBox 40"/>
-          <p:cNvSpPr txBox="1"/>
-          <p:nvPr/>
-        </p:nvSpPr>
-        <p:spPr>
-          <a:xfrm>
-            <a:off x="9098280" y="3200400"/>
-            <a:ext cx="2624328" cy="310896"/>
-          </a:xfrm>
-          <a:prstGeom prst="rect">
-            <a:avLst/>
-          </a:prstGeom>
-          <a:noFill/>
-        </p:spPr>
-        <p:txBody>
-          <a:bodyPr wrap="square" lIns="45720" rIns="45720" tIns="18288" bIns="18288">
-            <a:spAutoFit/>
-          </a:bodyPr>
-          <a:lstStyle/>
-          <a:p>
-            <a:pPr algn="ctr"/>
-            <a:r>
-              <a:rPr sz="850" b="1" i="1">
-                <a:solidFill>
-                  <a:srgbClr val="4338CA"/>
-                </a:solidFill>
-                <a:latin typeface="Calibri"/>
-              </a:rPr>
-              <a:t>Alto riesgo · certificación oficial</a:t>
-            </a:r>
-          </a:p>
-        </p:txBody>
-      </p:sp>
-      <p:sp>
-        <p:nvSpPr>
-          <p:cNvPr id="42" name="TextBox 41"/>
-          <p:cNvSpPr txBox="1"/>
-          <p:nvPr/>
-        </p:nvSpPr>
-        <p:spPr>
-          <a:xfrm>
-            <a:off x="9162288" y="3584448"/>
-            <a:ext cx="2532888" cy="1828800"/>
-          </a:xfrm>
-          <a:prstGeom prst="rect">
-            <a:avLst/>
-          </a:prstGeom>
-          <a:noFill/>
-        </p:spPr>
-        <p:txBody>
-          <a:bodyPr wrap="square" lIns="45720" rIns="45720" tIns="18288" bIns="18288">
-            <a:spAutoFit/>
-          </a:bodyPr>
-          <a:lstStyle/>
-          <a:p>
-            <a:pPr>
-              <a:lnSpc>
-                <a:spcPct val="100000"/>
-              </a:lnSpc>
-              <a:spcAft>
-                <a:spcPts val="500"/>
-              </a:spcAft>
-            </a:pPr>
-            <a:r>
-              <a:rPr sz="1050" b="1" i="0">
-                <a:solidFill>
-                  <a:srgbClr val="059669"/>
-                </a:solidFill>
-                <a:latin typeface="Calibri"/>
-              </a:rPr>
-              <a:t>✓ </a:t>
-            </a:r>
-            <a:r>
-              <a:rPr sz="1050" b="0" i="0">
-                <a:solidFill>
-                  <a:srgbClr val="1F2937"/>
-                </a:solidFill>
-                <a:latin typeface="Calibri"/>
-              </a:rPr>
-              <a:t>Todo el catálogo</a:t>
-            </a:r>
-          </a:p>
-          <a:p>
-            <a:pPr>
-              <a:lnSpc>
-                <a:spcPct val="100000"/>
-              </a:lnSpc>
-              <a:spcAft>
-                <a:spcPts val="500"/>
-              </a:spcAft>
-            </a:pPr>
-            <a:r>
-              <a:rPr sz="1050" b="1" i="0">
-                <a:solidFill>
-                  <a:srgbClr val="059669"/>
-                </a:solidFill>
-                <a:latin typeface="Calibri"/>
-              </a:rPr>
-              <a:t>✓ </a:t>
-            </a:r>
-            <a:r>
-              <a:rPr sz="1050" b="0" i="0">
-                <a:solidFill>
-                  <a:srgbClr val="1F2937"/>
-                </a:solidFill>
-                <a:latin typeface="Calibri"/>
-              </a:rPr>
-              <a:t>+ Proctoring, ejecución de código (Java/Python)</a:t>
-            </a:r>
-          </a:p>
-          <a:p>
-            <a:pPr>
-              <a:lnSpc>
-                <a:spcPct val="100000"/>
-              </a:lnSpc>
-              <a:spcAft>
-                <a:spcPts val="500"/>
-              </a:spcAft>
-            </a:pPr>
-            <a:r>
-              <a:rPr sz="1050" b="1" i="0">
-                <a:solidFill>
-                  <a:srgbClr val="059669"/>
-                </a:solidFill>
-                <a:latin typeface="Calibri"/>
-              </a:rPr>
-              <a:t>✓ </a:t>
-            </a:r>
-            <a:r>
-              <a:rPr sz="1050" b="0" i="0">
-                <a:solidFill>
-                  <a:srgbClr val="1F2937"/>
-                </a:solidFill>
-                <a:latin typeface="Calibri"/>
-              </a:rPr>
-              <a:t>+ Certificados oficiales, informes, asistente IA, SLA</a:t>
-            </a:r>
-          </a:p>
-        </p:txBody>
-      </p:sp>
-      <p:sp>
-        <p:nvSpPr>
-          <p:cNvPr id="43" name="TextBox 42"/>
-          <p:cNvSpPr txBox="1"/>
-          <p:nvPr/>
-        </p:nvSpPr>
-        <p:spPr>
-          <a:xfrm>
-            <a:off x="9162288" y="5605272"/>
-            <a:ext cx="2496312" cy="731520"/>
-          </a:xfrm>
-          <a:prstGeom prst="rect">
-            <a:avLst/>
-          </a:prstGeom>
-          <a:noFill/>
-        </p:spPr>
-        <p:txBody>
-          <a:bodyPr wrap="square" lIns="45720" rIns="45720" tIns="18288" bIns="18288">
-            <a:spAutoFit/>
-          </a:bodyPr>
-          <a:lstStyle/>
-          <a:p>
-            <a:r>
-              <a:rPr sz="900" b="0" i="1">
-                <a:solidFill>
-                  <a:srgbClr val="6B7280"/>
-                </a:solidFill>
-                <a:latin typeface="Calibri"/>
-              </a:rPr>
-              <a:t>Add-ons medidos: IA por consumo, code-runner, video, BYOK</a:t>
-            </a:r>
-          </a:p>
-        </p:txBody>
-      </p:sp>
-      <p:sp>
-        <p:nvSpPr>
-          <p:cNvPr id="44" name="TextBox 43"/>
-          <p:cNvSpPr txBox="1"/>
-          <p:nvPr/>
-        </p:nvSpPr>
-        <p:spPr>
-          <a:xfrm>
-            <a:off x="384048" y="6556248"/>
-            <a:ext cx="11430000" cy="274320"/>
-          </a:xfrm>
-          <a:prstGeom prst="rect">
-            <a:avLst/>
-          </a:prstGeom>
-          <a:noFill/>
-        </p:spPr>
-        <p:txBody>
-          <a:bodyPr wrap="square" lIns="45720" rIns="45720" tIns="18288" bIns="18288">
-            <a:spAutoFit/>
-          </a:bodyPr>
-          <a:lstStyle/>
-          <a:p>
-            <a:r>
-              <a:rPr sz="950" b="0" i="1">
-                <a:solidFill>
-                  <a:srgbClr val="6B7280"/>
-                </a:solidFill>
-                <a:latin typeface="Calibri"/>
-              </a:rPr>
-              <a:t>Núcleo educativo (dar clase + evaluar manual + notas + asistencia) SIEMPRE incluido, aun en el plan gratis. Detalle técnico y de migración en modelo-negocio-modular.md</a:t>
+              <a:t>Armá tu plan a la medida</a:t>
+            </a:r>
+          </a:p>
+        </p:txBody>
+      </p:sp>
+      <p:sp>
+        <p:nvSpPr>
+          <p:cNvPr id="4" name="TextBox 3"/>
+          <p:cNvSpPr txBox="1"/>
+          <p:nvPr/>
+        </p:nvSpPr>
+        <p:spPr>
+          <a:xfrm>
+            <a:off x="914400" y="3566160"/>
+            <a:ext cx="10332720" cy="731520"/>
+          </a:xfrm>
+          <a:prstGeom prst="rect">
+            <a:avLst/>
+          </a:prstGeom>
+          <a:noFill/>
+        </p:spPr>
+        <p:txBody>
+          <a:bodyPr wrap="square" anchor="t" lIns="0" rIns="0" tIns="0" bIns="0">
+            <a:spAutoFit/>
+          </a:bodyPr>
+          <a:lstStyle/>
+          <a:p>
+            <a:pPr algn="l"/>
+            <a:r>
+              <a:rPr sz="1700" b="0" i="0">
+                <a:solidFill>
+                  <a:srgbClr val="C9DDE3"/>
+                </a:solidFill>
+                <a:latin typeface="Calibri"/>
+              </a:rPr>
+              <a:t>Empezás con el plan de tu tamaño y sumás solo los add-ons que tu institución realmente necesita. Sin versión gratuita, sin pagar por lo que no usás.</a:t>
             </a:r>
           </a:p>
         </p:txBody>
